--- a/_Template_ PPT Format  _PPL.pptx (1).pptx
+++ b/_Template_ PPT Format  _PPL.pptx (1).pptx
@@ -24,6 +24,14 @@
     <p:sldId id="272" r:id="rId18"/>
     <p:sldId id="273" r:id="rId19"/>
     <p:sldId id="274" r:id="rId20"/>
+    <p:sldId id="275" r:id="rId21"/>
+    <p:sldId id="276" r:id="rId22"/>
+    <p:sldId id="277" r:id="rId23"/>
+    <p:sldId id="278" r:id="rId24"/>
+    <p:sldId id="279" r:id="rId25"/>
+    <p:sldId id="280" r:id="rId26"/>
+    <p:sldId id="281" r:id="rId27"/>
+    <p:sldId id="282" r:id="rId28"/>
   </p:sldIdLst>
   <p:sldSz cx="9144000" cy="6858000" type="screen4x3"/>
   <p:notesSz cx="9144000" cy="6858000"/>
@@ -196,7 +204,7 @@
           <a:p>
             <a:fld id="{1D8BD707-D9CF-40AE-B4C6-C98DA3205C09}" type="datetimeFigureOut">
               <a:rPr lang="en-US"/>
-              <a:t>9/19/2026</a:t>
+              <a:t>10/11/2026</a:t>
             </a:fld>
             <a:endParaRPr lang="en-US"/>
           </a:p>
@@ -367,7 +375,7 @@
           <a:p>
             <a:fld id="{1D8BD707-D9CF-40AE-B4C6-C98DA3205C09}" type="datetimeFigureOut">
               <a:rPr lang="en-US"/>
-              <a:t>9/19/2026</a:t>
+              <a:t>10/11/2026</a:t>
             </a:fld>
             <a:endParaRPr lang="en-US"/>
           </a:p>
@@ -581,7 +589,7 @@
           <a:p>
             <a:fld id="{1D8BD707-D9CF-40AE-B4C6-C98DA3205C09}" type="datetimeFigureOut">
               <a:rPr lang="en-US"/>
-              <a:t>9/19/2026</a:t>
+              <a:t>10/11/2026</a:t>
             </a:fld>
             <a:endParaRPr lang="en-US"/>
           </a:p>
@@ -729,7 +737,7 @@
           <a:p>
             <a:fld id="{1D8BD707-D9CF-40AE-B4C6-C98DA3205C09}" type="datetimeFigureOut">
               <a:rPr lang="en-US"/>
-              <a:t>9/19/2026</a:t>
+              <a:t>10/11/2026</a:t>
             </a:fld>
             <a:endParaRPr lang="en-US"/>
           </a:p>
@@ -848,7 +856,7 @@
           <a:p>
             <a:fld id="{1D8BD707-D9CF-40AE-B4C6-C98DA3205C09}" type="datetimeFigureOut">
               <a:rPr lang="en-US"/>
-              <a:t>9/19/2026</a:t>
+              <a:t>10/11/2026</a:t>
             </a:fld>
             <a:endParaRPr lang="en-US"/>
           </a:p>
@@ -1172,7 +1180,7 @@
           <a:p>
             <a:fld id="{1D8BD707-D9CF-40AE-B4C6-C98DA3205C09}" type="datetimeFigureOut">
               <a:rPr lang="en-US"/>
-              <a:t>9/19/2026</a:t>
+              <a:t>10/11/2026</a:t>
             </a:fld>
             <a:endParaRPr lang="en-US"/>
           </a:p>
@@ -5317,8 +5325,12 @@
           <a:lstStyle/>
           <a:p>
             <a:r>
+              <a:rPr lang="en-US" spc="-70" dirty="0"/>
+              <a:t>Phase – 3</a:t>
+            </a:r>
+            <a:r>
               <a:rPr lang="en-US" dirty="0"/>
-              <a:t>Thank  You </a:t>
+              <a:t> </a:t>
             </a:r>
             <a:endParaRPr lang="en-IN" dirty="0"/>
           </a:p>
@@ -5351,6 +5363,50 @@
           <a:lstStyle/>
           <a:p>
             <a:endParaRPr lang="en-IN" dirty="0"/>
+          </a:p>
+        </p:txBody>
+      </p:sp>
+      <p:sp>
+        <p:nvSpPr>
+          <p:cNvPr id="5" name="Arrow: Right 4">
+            <a:extLst>
+              <a:ext uri="{FF2B5EF4-FFF2-40B4-BE49-F238E27FC236}">
+                <a16:creationId xmlns:a16="http://schemas.microsoft.com/office/drawing/2014/main" id="{8961A29C-5B19-1BA9-38DA-605A9895832E}"/>
+              </a:ext>
+            </a:extLst>
+          </p:cNvPr>
+          <p:cNvSpPr/>
+          <p:nvPr/>
+        </p:nvSpPr>
+        <p:spPr>
+          <a:xfrm>
+            <a:off x="5562600" y="3023512"/>
+            <a:ext cx="978408" cy="484632"/>
+          </a:xfrm>
+          <a:prstGeom prst="rightArrow">
+            <a:avLst/>
+          </a:prstGeom>
+        </p:spPr>
+        <p:style>
+          <a:lnRef idx="1">
+            <a:schemeClr val="accent5"/>
+          </a:lnRef>
+          <a:fillRef idx="2">
+            <a:schemeClr val="accent5"/>
+          </a:fillRef>
+          <a:effectRef idx="1">
+            <a:schemeClr val="accent5"/>
+          </a:effectRef>
+          <a:fontRef idx="minor">
+            <a:schemeClr val="dk1"/>
+          </a:fontRef>
+        </p:style>
+        <p:txBody>
+          <a:bodyPr rtlCol="0" anchor="ctr"/>
+          <a:lstStyle/>
+          <a:p>
+            <a:pPr algn="ctr"/>
+            <a:endParaRPr lang="en-IN"/>
           </a:p>
         </p:txBody>
       </p:sp>
@@ -6033,6 +6089,2974 @@
         </p:spPr>
       </p:pic>
     </p:spTree>
+  </p:cSld>
+  <p:clrMapOvr>
+    <a:masterClrMapping/>
+  </p:clrMapOvr>
+</p:sld>
+</file>
+
+<file path=ppt/slides/slide20.xml><?xml version="1.0" encoding="utf-8"?>
+<p:sld xmlns:a="http://schemas.openxmlformats.org/drawingml/2006/main" xmlns:r="http://schemas.openxmlformats.org/officeDocument/2006/relationships" xmlns:p="http://schemas.openxmlformats.org/presentationml/2006/main">
+  <p:cSld>
+    <p:spTree>
+      <p:nvGrpSpPr>
+        <p:cNvPr id="1" name=""/>
+        <p:cNvGrpSpPr/>
+        <p:nvPr/>
+      </p:nvGrpSpPr>
+      <p:grpSpPr>
+        <a:xfrm>
+          <a:off x="0" y="0"/>
+          <a:ext cx="0" cy="0"/>
+          <a:chOff x="0" y="0"/>
+          <a:chExt cx="0" cy="0"/>
+        </a:xfrm>
+      </p:grpSpPr>
+      <p:sp>
+        <p:nvSpPr>
+          <p:cNvPr id="3" name="Text Placeholder 2">
+            <a:extLst>
+              <a:ext uri="{FF2B5EF4-FFF2-40B4-BE49-F238E27FC236}">
+                <a16:creationId xmlns:a16="http://schemas.microsoft.com/office/drawing/2014/main" id="{22C91692-3CB8-9F1F-53D6-624073C43FA1}"/>
+              </a:ext>
+            </a:extLst>
+          </p:cNvPr>
+          <p:cNvSpPr>
+            <a:spLocks noGrp="1"/>
+          </p:cNvSpPr>
+          <p:nvPr>
+            <p:ph type="body" idx="1"/>
+          </p:nvPr>
+        </p:nvSpPr>
+        <p:spPr>
+          <a:xfrm>
+            <a:off x="457200" y="1295400"/>
+            <a:ext cx="5410200" cy="584775"/>
+          </a:xfrm>
+        </p:spPr>
+        <p:txBody>
+          <a:bodyPr/>
+          <a:lstStyle/>
+          <a:p>
+            <a:r>
+              <a:rPr lang="en-IN" sz="2000" b="1" dirty="0">
+                <a:latin typeface="Times New Roman" panose="02020603050405020304" pitchFamily="18" charset="0"/>
+                <a:cs typeface="Times New Roman" panose="02020603050405020304" pitchFamily="18" charset="0"/>
+              </a:rPr>
+              <a:t>Final Implementation, Testing and Deployment</a:t>
+            </a:r>
+            <a:endParaRPr lang="en-IN" sz="2000" dirty="0">
+              <a:latin typeface="Times New Roman" panose="02020603050405020304" pitchFamily="18" charset="0"/>
+              <a:cs typeface="Times New Roman" panose="02020603050405020304" pitchFamily="18" charset="0"/>
+            </a:endParaRPr>
+          </a:p>
+          <a:p>
+            <a:endParaRPr lang="en-IN" dirty="0"/>
+          </a:p>
+        </p:txBody>
+      </p:sp>
+      <p:sp>
+        <p:nvSpPr>
+          <p:cNvPr id="4" name="Text Placeholder 4">
+            <a:extLst>
+              <a:ext uri="{FF2B5EF4-FFF2-40B4-BE49-F238E27FC236}">
+                <a16:creationId xmlns:a16="http://schemas.microsoft.com/office/drawing/2014/main" id="{BF10E6B4-48A5-D4AC-68BF-DAC25FFC18B7}"/>
+              </a:ext>
+            </a:extLst>
+          </p:cNvPr>
+          <p:cNvSpPr txBox="1">
+            <a:spLocks/>
+          </p:cNvSpPr>
+          <p:nvPr/>
+        </p:nvSpPr>
+        <p:spPr>
+          <a:xfrm>
+            <a:off x="304800" y="351246"/>
+            <a:ext cx="8534400" cy="681038"/>
+          </a:xfrm>
+          <a:prstGeom prst="roundRect">
+            <a:avLst/>
+          </a:prstGeom>
+        </p:spPr>
+        <p:style>
+          <a:lnRef idx="1">
+            <a:schemeClr val="accent1"/>
+          </a:lnRef>
+          <a:fillRef idx="2">
+            <a:schemeClr val="accent1"/>
+          </a:fillRef>
+          <a:effectRef idx="1">
+            <a:schemeClr val="accent1"/>
+          </a:effectRef>
+          <a:fontRef idx="minor">
+            <a:schemeClr val="dk1"/>
+          </a:fontRef>
+        </p:style>
+        <p:txBody>
+          <a:bodyPr wrap="square" lIns="0" tIns="0" rIns="0" bIns="0" rtlCol="0" anchor="ctr">
+            <a:spAutoFit/>
+          </a:bodyPr>
+          <a:lstStyle>
+            <a:lvl1pPr marL="0">
+              <a:defRPr>
+                <a:solidFill>
+                  <a:schemeClr val="dk1"/>
+                </a:solidFill>
+                <a:latin typeface="+mn-lt"/>
+                <a:ea typeface="+mn-ea"/>
+                <a:cs typeface="+mn-cs"/>
+              </a:defRPr>
+            </a:lvl1pPr>
+            <a:lvl2pPr marL="457200">
+              <a:defRPr>
+                <a:solidFill>
+                  <a:schemeClr val="dk1"/>
+                </a:solidFill>
+                <a:latin typeface="+mn-lt"/>
+                <a:ea typeface="+mn-ea"/>
+                <a:cs typeface="+mn-cs"/>
+              </a:defRPr>
+            </a:lvl2pPr>
+            <a:lvl3pPr marL="914400">
+              <a:defRPr>
+                <a:solidFill>
+                  <a:schemeClr val="dk1"/>
+                </a:solidFill>
+                <a:latin typeface="+mn-lt"/>
+                <a:ea typeface="+mn-ea"/>
+                <a:cs typeface="+mn-cs"/>
+              </a:defRPr>
+            </a:lvl3pPr>
+            <a:lvl4pPr marL="1371600">
+              <a:defRPr>
+                <a:solidFill>
+                  <a:schemeClr val="dk1"/>
+                </a:solidFill>
+                <a:latin typeface="+mn-lt"/>
+                <a:ea typeface="+mn-ea"/>
+                <a:cs typeface="+mn-cs"/>
+              </a:defRPr>
+            </a:lvl4pPr>
+            <a:lvl5pPr marL="1828800">
+              <a:defRPr>
+                <a:solidFill>
+                  <a:schemeClr val="dk1"/>
+                </a:solidFill>
+                <a:latin typeface="+mn-lt"/>
+                <a:ea typeface="+mn-ea"/>
+                <a:cs typeface="+mn-cs"/>
+              </a:defRPr>
+            </a:lvl5pPr>
+            <a:lvl6pPr marL="2286000">
+              <a:defRPr>
+                <a:solidFill>
+                  <a:schemeClr val="dk1"/>
+                </a:solidFill>
+                <a:latin typeface="+mn-lt"/>
+                <a:ea typeface="+mn-ea"/>
+                <a:cs typeface="+mn-cs"/>
+              </a:defRPr>
+            </a:lvl6pPr>
+            <a:lvl7pPr marL="2743200">
+              <a:defRPr>
+                <a:solidFill>
+                  <a:schemeClr val="dk1"/>
+                </a:solidFill>
+                <a:latin typeface="+mn-lt"/>
+                <a:ea typeface="+mn-ea"/>
+                <a:cs typeface="+mn-cs"/>
+              </a:defRPr>
+            </a:lvl7pPr>
+            <a:lvl8pPr marL="3200400">
+              <a:defRPr>
+                <a:solidFill>
+                  <a:schemeClr val="dk1"/>
+                </a:solidFill>
+                <a:latin typeface="+mn-lt"/>
+                <a:ea typeface="+mn-ea"/>
+                <a:cs typeface="+mn-cs"/>
+              </a:defRPr>
+            </a:lvl8pPr>
+            <a:lvl9pPr marL="3657600">
+              <a:defRPr>
+                <a:solidFill>
+                  <a:schemeClr val="dk1"/>
+                </a:solidFill>
+                <a:latin typeface="+mn-lt"/>
+                <a:ea typeface="+mn-ea"/>
+                <a:cs typeface="+mn-cs"/>
+              </a:defRPr>
+            </a:lvl9pPr>
+          </a:lstStyle>
+          <a:p>
+            <a:pPr algn="ctr"/>
+            <a:r>
+              <a:rPr lang="en-US" sz="4000" b="1" dirty="0">
+                <a:ln w="12700">
+                  <a:solidFill>
+                    <a:schemeClr val="accent5"/>
+                  </a:solidFill>
+                  <a:prstDash val="solid"/>
+                </a:ln>
+                <a:pattFill prst="ltDnDiag">
+                  <a:fgClr>
+                    <a:schemeClr val="accent5">
+                      <a:lumMod val="60000"/>
+                      <a:lumOff val="40000"/>
+                    </a:schemeClr>
+                  </a:fgClr>
+                  <a:bgClr>
+                    <a:schemeClr val="bg1"/>
+                  </a:bgClr>
+                </a:pattFill>
+                <a:latin typeface="Times New Roman" panose="02020603050405020304" pitchFamily="18" charset="0"/>
+                <a:cs typeface="Times New Roman" panose="02020603050405020304" pitchFamily="18" charset="0"/>
+              </a:rPr>
+              <a:t>Final Project Implementation</a:t>
+            </a:r>
+            <a:endParaRPr lang="en-IN" sz="4000" b="1" dirty="0">
+              <a:ln w="12700">
+                <a:solidFill>
+                  <a:schemeClr val="accent5"/>
+                </a:solidFill>
+                <a:prstDash val="solid"/>
+              </a:ln>
+              <a:pattFill prst="ltDnDiag">
+                <a:fgClr>
+                  <a:schemeClr val="accent5">
+                    <a:lumMod val="60000"/>
+                    <a:lumOff val="40000"/>
+                  </a:schemeClr>
+                </a:fgClr>
+                <a:bgClr>
+                  <a:schemeClr val="bg1"/>
+                </a:bgClr>
+              </a:pattFill>
+              <a:latin typeface="Times New Roman" panose="02020603050405020304" pitchFamily="18" charset="0"/>
+              <a:cs typeface="Times New Roman" panose="02020603050405020304" pitchFamily="18" charset="0"/>
+            </a:endParaRPr>
+          </a:p>
+        </p:txBody>
+      </p:sp>
+      <p:pic>
+        <p:nvPicPr>
+          <p:cNvPr id="6" name="Picture 5">
+            <a:extLst>
+              <a:ext uri="{FF2B5EF4-FFF2-40B4-BE49-F238E27FC236}">
+                <a16:creationId xmlns:a16="http://schemas.microsoft.com/office/drawing/2014/main" id="{EA42E164-85EC-4C67-E4D0-735B6C0E1408}"/>
+              </a:ext>
+            </a:extLst>
+          </p:cNvPr>
+          <p:cNvPicPr>
+            <a:picLocks noChangeAspect="1"/>
+          </p:cNvPicPr>
+          <p:nvPr/>
+        </p:nvPicPr>
+        <p:blipFill>
+          <a:blip r:embed="rId2" cstate="print">
+            <a:extLst>
+              <a:ext uri="{28A0092B-C50C-407E-A947-70E740481C1C}">
+                <a14:useLocalDpi xmlns:a14="http://schemas.microsoft.com/office/drawing/2010/main" val="0"/>
+              </a:ext>
+            </a:extLst>
+          </a:blip>
+          <a:stretch>
+            <a:fillRect/>
+          </a:stretch>
+        </p:blipFill>
+        <p:spPr>
+          <a:xfrm>
+            <a:off x="304800" y="358928"/>
+            <a:ext cx="729685" cy="681038"/>
+          </a:xfrm>
+          <a:prstGeom prst="rect">
+            <a:avLst/>
+          </a:prstGeom>
+        </p:spPr>
+      </p:pic>
+      <p:sp>
+        <p:nvSpPr>
+          <p:cNvPr id="7" name="TextBox 6">
+            <a:extLst>
+              <a:ext uri="{FF2B5EF4-FFF2-40B4-BE49-F238E27FC236}">
+                <a16:creationId xmlns:a16="http://schemas.microsoft.com/office/drawing/2014/main" id="{8B516BEE-1DF1-C647-D444-325D3B9127E0}"/>
+              </a:ext>
+            </a:extLst>
+          </p:cNvPr>
+          <p:cNvSpPr txBox="1"/>
+          <p:nvPr/>
+        </p:nvSpPr>
+        <p:spPr>
+          <a:xfrm>
+            <a:off x="457200" y="1880175"/>
+            <a:ext cx="8229600" cy="4062651"/>
+          </a:xfrm>
+          <a:prstGeom prst="rect">
+            <a:avLst/>
+          </a:prstGeom>
+          <a:noFill/>
+        </p:spPr>
+        <p:txBody>
+          <a:bodyPr wrap="square" rtlCol="0">
+            <a:spAutoFit/>
+          </a:bodyPr>
+          <a:lstStyle/>
+          <a:p>
+            <a:pPr marL="457200" lvl="0" indent="-457200">
+              <a:lnSpc>
+                <a:spcPct val="150000"/>
+              </a:lnSpc>
+              <a:buFont typeface="Wingdings" panose="05000000000000000000" pitchFamily="2" charset="2"/>
+              <a:buChar char="ü"/>
+            </a:pPr>
+            <a:r>
+              <a:rPr lang="en-IN" sz="2000" dirty="0">
+                <a:latin typeface="Times New Roman" panose="02020603050405020304" pitchFamily="18" charset="0"/>
+                <a:cs typeface="Times New Roman" panose="02020603050405020304" pitchFamily="18" charset="0"/>
+              </a:rPr>
+              <a:t>Developed a Python-based password generator.</a:t>
+            </a:r>
+          </a:p>
+          <a:p>
+            <a:pPr marL="457200" lvl="0" indent="-457200">
+              <a:lnSpc>
+                <a:spcPct val="150000"/>
+              </a:lnSpc>
+              <a:buFont typeface="Wingdings" panose="05000000000000000000" pitchFamily="2" charset="2"/>
+              <a:buChar char="ü"/>
+            </a:pPr>
+            <a:r>
+              <a:rPr lang="en-IN" sz="2000" dirty="0">
+                <a:latin typeface="Times New Roman" panose="02020603050405020304" pitchFamily="18" charset="0"/>
+                <a:cs typeface="Times New Roman" panose="02020603050405020304" pitchFamily="18" charset="0"/>
+              </a:rPr>
+              <a:t>Implemented customizable password generation.</a:t>
+            </a:r>
+          </a:p>
+          <a:p>
+            <a:pPr marL="457200" lvl="0" indent="-457200">
+              <a:lnSpc>
+                <a:spcPct val="150000"/>
+              </a:lnSpc>
+              <a:buFont typeface="Wingdings" panose="05000000000000000000" pitchFamily="2" charset="2"/>
+              <a:buChar char="ü"/>
+            </a:pPr>
+            <a:r>
+              <a:rPr lang="en-IN" sz="2000" dirty="0">
+                <a:latin typeface="Times New Roman" panose="02020603050405020304" pitchFamily="18" charset="0"/>
+                <a:cs typeface="Times New Roman" panose="02020603050405020304" pitchFamily="18" charset="0"/>
+              </a:rPr>
+              <a:t>Added password strength checking and input validation.</a:t>
+            </a:r>
+          </a:p>
+          <a:p>
+            <a:pPr marL="457200" lvl="0" indent="-457200">
+              <a:lnSpc>
+                <a:spcPct val="150000"/>
+              </a:lnSpc>
+              <a:buFont typeface="Wingdings" panose="05000000000000000000" pitchFamily="2" charset="2"/>
+              <a:buChar char="ü"/>
+            </a:pPr>
+            <a:r>
+              <a:rPr lang="en-IN" sz="2000" dirty="0">
+                <a:latin typeface="Times New Roman" panose="02020603050405020304" pitchFamily="18" charset="0"/>
+                <a:cs typeface="Times New Roman" panose="02020603050405020304" pitchFamily="18" charset="0"/>
+              </a:rPr>
+              <a:t>Organized the project files in GitHub.</a:t>
+            </a:r>
+          </a:p>
+          <a:p>
+            <a:pPr marL="342900" lvl="0" indent="-342900">
+              <a:lnSpc>
+                <a:spcPct val="150000"/>
+              </a:lnSpc>
+              <a:buFont typeface="Wingdings" panose="05000000000000000000" pitchFamily="2" charset="2"/>
+              <a:buChar char="ü"/>
+            </a:pPr>
+            <a:r>
+              <a:rPr lang="en-IN" sz="2000" dirty="0">
+                <a:latin typeface="Times New Roman" panose="02020603050405020304" pitchFamily="18" charset="0"/>
+                <a:cs typeface="Times New Roman" panose="02020603050405020304" pitchFamily="18" charset="0"/>
+              </a:rPr>
+              <a:t>  Tested the application for correct functionality</a:t>
+            </a:r>
+            <a:r>
+              <a:rPr lang="en-IN" dirty="0"/>
+              <a:t>.</a:t>
+            </a:r>
+          </a:p>
+          <a:p>
+            <a:pPr marL="285750" lvl="0" indent="-285750">
+              <a:lnSpc>
+                <a:spcPct val="150000"/>
+              </a:lnSpc>
+              <a:buFont typeface="Wingdings" panose="05000000000000000000" pitchFamily="2" charset="2"/>
+              <a:buChar char="ü"/>
+            </a:pPr>
+            <a:r>
+              <a:rPr lang="en-IN" sz="2000" dirty="0"/>
+              <a:t>   </a:t>
+            </a:r>
+            <a:r>
+              <a:rPr lang="en-IN" sz="2000" dirty="0">
+                <a:latin typeface="Times New Roman" panose="02020603050405020304" pitchFamily="18" charset="0"/>
+                <a:cs typeface="Times New Roman" panose="02020603050405020304" pitchFamily="18" charset="0"/>
+              </a:rPr>
+              <a:t>Implemented password strength checking and input validation.</a:t>
+            </a:r>
+          </a:p>
+          <a:p>
+            <a:pPr marL="285750" lvl="0" indent="-285750">
+              <a:lnSpc>
+                <a:spcPct val="150000"/>
+              </a:lnSpc>
+              <a:buFont typeface="Wingdings" panose="05000000000000000000" pitchFamily="2" charset="2"/>
+              <a:buChar char="ü"/>
+            </a:pPr>
+            <a:r>
+              <a:rPr lang="en-IN" sz="2000" dirty="0">
+                <a:latin typeface="Times New Roman" panose="02020603050405020304" pitchFamily="18" charset="0"/>
+                <a:cs typeface="Times New Roman" panose="02020603050405020304" pitchFamily="18" charset="0"/>
+              </a:rPr>
+              <a:t>   Added options to generate multiple passwords and save them in a text file.</a:t>
+            </a:r>
+          </a:p>
+          <a:p>
+            <a:pPr marL="285750" lvl="0" indent="-285750">
+              <a:lnSpc>
+                <a:spcPct val="150000"/>
+              </a:lnSpc>
+              <a:buFont typeface="Wingdings" panose="05000000000000000000" pitchFamily="2" charset="2"/>
+              <a:buChar char="ü"/>
+            </a:pPr>
+            <a:endParaRPr lang="en-IN" sz="2000" dirty="0"/>
+          </a:p>
+          <a:p>
+            <a:endParaRPr lang="en-IN" dirty="0"/>
+          </a:p>
+        </p:txBody>
+      </p:sp>
+    </p:spTree>
+    <p:extLst>
+      <p:ext uri="{BB962C8B-B14F-4D97-AF65-F5344CB8AC3E}">
+        <p14:creationId xmlns:p14="http://schemas.microsoft.com/office/powerpoint/2010/main" val="61106150"/>
+      </p:ext>
+    </p:extLst>
+  </p:cSld>
+  <p:clrMapOvr>
+    <a:masterClrMapping/>
+  </p:clrMapOvr>
+</p:sld>
+</file>
+
+<file path=ppt/slides/slide21.xml><?xml version="1.0" encoding="utf-8"?>
+<p:sld xmlns:a="http://schemas.openxmlformats.org/drawingml/2006/main" xmlns:r="http://schemas.openxmlformats.org/officeDocument/2006/relationships" xmlns:p="http://schemas.openxmlformats.org/presentationml/2006/main">
+  <p:cSld>
+    <p:spTree>
+      <p:nvGrpSpPr>
+        <p:cNvPr id="1" name=""/>
+        <p:cNvGrpSpPr/>
+        <p:nvPr/>
+      </p:nvGrpSpPr>
+      <p:grpSpPr>
+        <a:xfrm>
+          <a:off x="0" y="0"/>
+          <a:ext cx="0" cy="0"/>
+          <a:chOff x="0" y="0"/>
+          <a:chExt cx="0" cy="0"/>
+        </a:xfrm>
+      </p:grpSpPr>
+      <p:sp>
+        <p:nvSpPr>
+          <p:cNvPr id="2" name="Title 1">
+            <a:extLst>
+              <a:ext uri="{FF2B5EF4-FFF2-40B4-BE49-F238E27FC236}">
+                <a16:creationId xmlns:a16="http://schemas.microsoft.com/office/drawing/2014/main" id="{481AABE0-5A63-8A64-E04A-1F92FBDA6B90}"/>
+              </a:ext>
+            </a:extLst>
+          </p:cNvPr>
+          <p:cNvSpPr>
+            <a:spLocks noGrp="1"/>
+          </p:cNvSpPr>
+          <p:nvPr>
+            <p:ph type="title"/>
+          </p:nvPr>
+        </p:nvSpPr>
+        <p:spPr/>
+        <p:txBody>
+          <a:bodyPr/>
+          <a:lstStyle/>
+          <a:p>
+            <a:endParaRPr lang="en-IN"/>
+          </a:p>
+        </p:txBody>
+      </p:sp>
+      <p:sp>
+        <p:nvSpPr>
+          <p:cNvPr id="3" name="Text Placeholder 2">
+            <a:extLst>
+              <a:ext uri="{FF2B5EF4-FFF2-40B4-BE49-F238E27FC236}">
+                <a16:creationId xmlns:a16="http://schemas.microsoft.com/office/drawing/2014/main" id="{02733EE0-D1D7-19CB-DAEF-CB21B6399FDA}"/>
+              </a:ext>
+            </a:extLst>
+          </p:cNvPr>
+          <p:cNvSpPr>
+            <a:spLocks noGrp="1"/>
+          </p:cNvSpPr>
+          <p:nvPr>
+            <p:ph type="body" idx="1"/>
+          </p:nvPr>
+        </p:nvSpPr>
+        <p:spPr>
+          <a:xfrm>
+            <a:off x="457200" y="1577340"/>
+            <a:ext cx="8229600" cy="3970318"/>
+          </a:xfrm>
+        </p:spPr>
+        <p:txBody>
+          <a:bodyPr/>
+          <a:lstStyle/>
+          <a:p>
+            <a:pPr marL="285750" lvl="0" indent="-285750">
+              <a:lnSpc>
+                <a:spcPct val="150000"/>
+              </a:lnSpc>
+              <a:buFont typeface="Wingdings" panose="05000000000000000000" pitchFamily="2" charset="2"/>
+              <a:buChar char="ü"/>
+            </a:pPr>
+            <a:r>
+              <a:rPr lang="en-IN" sz="2000" dirty="0">
+                <a:latin typeface="Times New Roman" panose="02020603050405020304" pitchFamily="18" charset="0"/>
+                <a:cs typeface="Times New Roman" panose="02020603050405020304" pitchFamily="18" charset="0"/>
+              </a:rPr>
+              <a:t>Customizable password length.</a:t>
+            </a:r>
+          </a:p>
+          <a:p>
+            <a:pPr marL="285750" lvl="0" indent="-285750">
+              <a:lnSpc>
+                <a:spcPct val="150000"/>
+              </a:lnSpc>
+              <a:buFont typeface="Wingdings" panose="05000000000000000000" pitchFamily="2" charset="2"/>
+              <a:buChar char="ü"/>
+            </a:pPr>
+            <a:r>
+              <a:rPr lang="en-IN" sz="2000" dirty="0">
+                <a:latin typeface="Times New Roman" panose="02020603050405020304" pitchFamily="18" charset="0"/>
+                <a:cs typeface="Times New Roman" panose="02020603050405020304" pitchFamily="18" charset="0"/>
+              </a:rPr>
+              <a:t>Uppercase and lowercase letters.</a:t>
+            </a:r>
+          </a:p>
+          <a:p>
+            <a:pPr marL="285750" lvl="0" indent="-285750">
+              <a:lnSpc>
+                <a:spcPct val="150000"/>
+              </a:lnSpc>
+              <a:buFont typeface="Wingdings" panose="05000000000000000000" pitchFamily="2" charset="2"/>
+              <a:buChar char="ü"/>
+            </a:pPr>
+            <a:r>
+              <a:rPr lang="en-IN" sz="2000" dirty="0">
+                <a:latin typeface="Times New Roman" panose="02020603050405020304" pitchFamily="18" charset="0"/>
+                <a:cs typeface="Times New Roman" panose="02020603050405020304" pitchFamily="18" charset="0"/>
+              </a:rPr>
+              <a:t>Numbers and special symbols.</a:t>
+            </a:r>
+          </a:p>
+          <a:p>
+            <a:pPr marL="285750" lvl="0" indent="-285750">
+              <a:lnSpc>
+                <a:spcPct val="150000"/>
+              </a:lnSpc>
+              <a:buFont typeface="Wingdings" panose="05000000000000000000" pitchFamily="2" charset="2"/>
+              <a:buChar char="ü"/>
+            </a:pPr>
+            <a:r>
+              <a:rPr lang="en-IN" sz="2000" dirty="0">
+                <a:latin typeface="Times New Roman" panose="02020603050405020304" pitchFamily="18" charset="0"/>
+                <a:cs typeface="Times New Roman" panose="02020603050405020304" pitchFamily="18" charset="0"/>
+              </a:rPr>
+              <a:t>Easy, Moderate and Strong presets.</a:t>
+            </a:r>
+          </a:p>
+          <a:p>
+            <a:pPr marL="285750" lvl="0" indent="-285750">
+              <a:lnSpc>
+                <a:spcPct val="150000"/>
+              </a:lnSpc>
+              <a:buFont typeface="Wingdings" panose="05000000000000000000" pitchFamily="2" charset="2"/>
+              <a:buChar char="ü"/>
+            </a:pPr>
+            <a:r>
+              <a:rPr lang="en-IN" sz="2000" dirty="0">
+                <a:latin typeface="Times New Roman" panose="02020603050405020304" pitchFamily="18" charset="0"/>
+                <a:cs typeface="Times New Roman" panose="02020603050405020304" pitchFamily="18" charset="0"/>
+              </a:rPr>
+              <a:t>Password strength checker.</a:t>
+            </a:r>
+          </a:p>
+          <a:p>
+            <a:pPr marL="285750" lvl="0" indent="-285750">
+              <a:lnSpc>
+                <a:spcPct val="150000"/>
+              </a:lnSpc>
+              <a:buFont typeface="Wingdings" panose="05000000000000000000" pitchFamily="2" charset="2"/>
+              <a:buChar char="ü"/>
+            </a:pPr>
+            <a:r>
+              <a:rPr lang="en-IN" sz="2000" dirty="0">
+                <a:latin typeface="Times New Roman" panose="02020603050405020304" pitchFamily="18" charset="0"/>
+                <a:cs typeface="Times New Roman" panose="02020603050405020304" pitchFamily="18" charset="0"/>
+              </a:rPr>
+              <a:t>Multiple password generation</a:t>
+            </a:r>
+          </a:p>
+          <a:p>
+            <a:pPr marL="285750" lvl="0" indent="-285750">
+              <a:lnSpc>
+                <a:spcPct val="150000"/>
+              </a:lnSpc>
+              <a:buFont typeface="Wingdings" panose="05000000000000000000" pitchFamily="2" charset="2"/>
+              <a:buChar char="ü"/>
+            </a:pPr>
+            <a:r>
+              <a:rPr lang="en-IN" sz="2000" dirty="0">
+                <a:latin typeface="Times New Roman" panose="02020603050405020304" pitchFamily="18" charset="0"/>
+                <a:cs typeface="Times New Roman" panose="02020603050405020304" pitchFamily="18" charset="0"/>
+              </a:rPr>
+              <a:t>Option to save passwords in a text file.</a:t>
+            </a:r>
+          </a:p>
+          <a:p>
+            <a:pPr marL="285750" lvl="0" indent="-285750">
+              <a:lnSpc>
+                <a:spcPct val="150000"/>
+              </a:lnSpc>
+              <a:buFont typeface="Wingdings" panose="05000000000000000000" pitchFamily="2" charset="2"/>
+              <a:buChar char="ü"/>
+            </a:pPr>
+            <a:r>
+              <a:rPr lang="en-IN" sz="2000" dirty="0">
+                <a:latin typeface="Times New Roman" panose="02020603050405020304" pitchFamily="18" charset="0"/>
+                <a:cs typeface="Times New Roman" panose="02020603050405020304" pitchFamily="18" charset="0"/>
+              </a:rPr>
+              <a:t>Input validation and exception handling.</a:t>
+            </a:r>
+          </a:p>
+          <a:p>
+            <a:endParaRPr lang="en-IN" dirty="0"/>
+          </a:p>
+        </p:txBody>
+      </p:sp>
+      <p:sp>
+        <p:nvSpPr>
+          <p:cNvPr id="4" name="Text Placeholder 4">
+            <a:extLst>
+              <a:ext uri="{FF2B5EF4-FFF2-40B4-BE49-F238E27FC236}">
+                <a16:creationId xmlns:a16="http://schemas.microsoft.com/office/drawing/2014/main" id="{113494B6-135A-09E0-17A3-04561055961B}"/>
+              </a:ext>
+            </a:extLst>
+          </p:cNvPr>
+          <p:cNvSpPr txBox="1">
+            <a:spLocks/>
+          </p:cNvSpPr>
+          <p:nvPr/>
+        </p:nvSpPr>
+        <p:spPr>
+          <a:xfrm>
+            <a:off x="304800" y="283142"/>
+            <a:ext cx="7467600" cy="817245"/>
+          </a:xfrm>
+          <a:prstGeom prst="roundRect">
+            <a:avLst/>
+          </a:prstGeom>
+        </p:spPr>
+        <p:style>
+          <a:lnRef idx="1">
+            <a:schemeClr val="accent1"/>
+          </a:lnRef>
+          <a:fillRef idx="2">
+            <a:schemeClr val="accent1"/>
+          </a:fillRef>
+          <a:effectRef idx="1">
+            <a:schemeClr val="accent1"/>
+          </a:effectRef>
+          <a:fontRef idx="minor">
+            <a:schemeClr val="dk1"/>
+          </a:fontRef>
+        </p:style>
+        <p:txBody>
+          <a:bodyPr wrap="square" lIns="0" tIns="0" rIns="0" bIns="0" rtlCol="0" anchor="ctr">
+            <a:spAutoFit/>
+          </a:bodyPr>
+          <a:lstStyle>
+            <a:lvl1pPr marL="0">
+              <a:defRPr>
+                <a:solidFill>
+                  <a:schemeClr val="dk1"/>
+                </a:solidFill>
+                <a:latin typeface="+mn-lt"/>
+                <a:ea typeface="+mn-ea"/>
+                <a:cs typeface="+mn-cs"/>
+              </a:defRPr>
+            </a:lvl1pPr>
+            <a:lvl2pPr marL="457200">
+              <a:defRPr>
+                <a:solidFill>
+                  <a:schemeClr val="dk1"/>
+                </a:solidFill>
+                <a:latin typeface="+mn-lt"/>
+                <a:ea typeface="+mn-ea"/>
+                <a:cs typeface="+mn-cs"/>
+              </a:defRPr>
+            </a:lvl2pPr>
+            <a:lvl3pPr marL="914400">
+              <a:defRPr>
+                <a:solidFill>
+                  <a:schemeClr val="dk1"/>
+                </a:solidFill>
+                <a:latin typeface="+mn-lt"/>
+                <a:ea typeface="+mn-ea"/>
+                <a:cs typeface="+mn-cs"/>
+              </a:defRPr>
+            </a:lvl3pPr>
+            <a:lvl4pPr marL="1371600">
+              <a:defRPr>
+                <a:solidFill>
+                  <a:schemeClr val="dk1"/>
+                </a:solidFill>
+                <a:latin typeface="+mn-lt"/>
+                <a:ea typeface="+mn-ea"/>
+                <a:cs typeface="+mn-cs"/>
+              </a:defRPr>
+            </a:lvl4pPr>
+            <a:lvl5pPr marL="1828800">
+              <a:defRPr>
+                <a:solidFill>
+                  <a:schemeClr val="dk1"/>
+                </a:solidFill>
+                <a:latin typeface="+mn-lt"/>
+                <a:ea typeface="+mn-ea"/>
+                <a:cs typeface="+mn-cs"/>
+              </a:defRPr>
+            </a:lvl5pPr>
+            <a:lvl6pPr marL="2286000">
+              <a:defRPr>
+                <a:solidFill>
+                  <a:schemeClr val="dk1"/>
+                </a:solidFill>
+                <a:latin typeface="+mn-lt"/>
+                <a:ea typeface="+mn-ea"/>
+                <a:cs typeface="+mn-cs"/>
+              </a:defRPr>
+            </a:lvl6pPr>
+            <a:lvl7pPr marL="2743200">
+              <a:defRPr>
+                <a:solidFill>
+                  <a:schemeClr val="dk1"/>
+                </a:solidFill>
+                <a:latin typeface="+mn-lt"/>
+                <a:ea typeface="+mn-ea"/>
+                <a:cs typeface="+mn-cs"/>
+              </a:defRPr>
+            </a:lvl7pPr>
+            <a:lvl8pPr marL="3200400">
+              <a:defRPr>
+                <a:solidFill>
+                  <a:schemeClr val="dk1"/>
+                </a:solidFill>
+                <a:latin typeface="+mn-lt"/>
+                <a:ea typeface="+mn-ea"/>
+                <a:cs typeface="+mn-cs"/>
+              </a:defRPr>
+            </a:lvl8pPr>
+            <a:lvl9pPr marL="3657600">
+              <a:defRPr>
+                <a:solidFill>
+                  <a:schemeClr val="dk1"/>
+                </a:solidFill>
+                <a:latin typeface="+mn-lt"/>
+                <a:ea typeface="+mn-ea"/>
+                <a:cs typeface="+mn-cs"/>
+              </a:defRPr>
+            </a:lvl9pPr>
+          </a:lstStyle>
+          <a:p>
+            <a:pPr algn="ctr"/>
+            <a:r>
+              <a:rPr lang="en-US" sz="4800" b="1" dirty="0">
+                <a:ln w="12700">
+                  <a:solidFill>
+                    <a:schemeClr val="accent5"/>
+                  </a:solidFill>
+                  <a:prstDash val="solid"/>
+                </a:ln>
+                <a:pattFill prst="ltDnDiag">
+                  <a:fgClr>
+                    <a:schemeClr val="accent5">
+                      <a:lumMod val="60000"/>
+                      <a:lumOff val="40000"/>
+                    </a:schemeClr>
+                  </a:fgClr>
+                  <a:bgClr>
+                    <a:schemeClr val="bg1"/>
+                  </a:bgClr>
+                </a:pattFill>
+                <a:latin typeface="Times New Roman" panose="02020603050405020304" pitchFamily="18" charset="0"/>
+                <a:cs typeface="Times New Roman" panose="02020603050405020304" pitchFamily="18" charset="0"/>
+              </a:rPr>
+              <a:t>Final Feature</a:t>
+            </a:r>
+            <a:endParaRPr lang="en-IN" sz="4800" b="1" dirty="0">
+              <a:ln w="12700">
+                <a:solidFill>
+                  <a:schemeClr val="accent5"/>
+                </a:solidFill>
+                <a:prstDash val="solid"/>
+              </a:ln>
+              <a:pattFill prst="ltDnDiag">
+                <a:fgClr>
+                  <a:schemeClr val="accent5">
+                    <a:lumMod val="60000"/>
+                    <a:lumOff val="40000"/>
+                  </a:schemeClr>
+                </a:fgClr>
+                <a:bgClr>
+                  <a:schemeClr val="bg1"/>
+                </a:bgClr>
+              </a:pattFill>
+              <a:latin typeface="Times New Roman" panose="02020603050405020304" pitchFamily="18" charset="0"/>
+              <a:cs typeface="Times New Roman" panose="02020603050405020304" pitchFamily="18" charset="0"/>
+            </a:endParaRPr>
+          </a:p>
+        </p:txBody>
+      </p:sp>
+      <p:pic>
+        <p:nvPicPr>
+          <p:cNvPr id="6" name="Picture 5">
+            <a:extLst>
+              <a:ext uri="{FF2B5EF4-FFF2-40B4-BE49-F238E27FC236}">
+                <a16:creationId xmlns:a16="http://schemas.microsoft.com/office/drawing/2014/main" id="{2426EB55-8699-DCB0-CA58-EBB26AFF2360}"/>
+              </a:ext>
+            </a:extLst>
+          </p:cNvPr>
+          <p:cNvPicPr>
+            <a:picLocks noChangeAspect="1"/>
+          </p:cNvPicPr>
+          <p:nvPr/>
+        </p:nvPicPr>
+        <p:blipFill>
+          <a:blip r:embed="rId2" cstate="print">
+            <a:extLst>
+              <a:ext uri="{28A0092B-C50C-407E-A947-70E740481C1C}">
+                <a14:useLocalDpi xmlns:a14="http://schemas.microsoft.com/office/drawing/2010/main" val="0"/>
+              </a:ext>
+            </a:extLst>
+          </a:blip>
+          <a:stretch>
+            <a:fillRect/>
+          </a:stretch>
+        </p:blipFill>
+        <p:spPr>
+          <a:xfrm>
+            <a:off x="304800" y="283141"/>
+            <a:ext cx="729685" cy="817245"/>
+          </a:xfrm>
+          <a:prstGeom prst="rect">
+            <a:avLst/>
+          </a:prstGeom>
+        </p:spPr>
+      </p:pic>
+    </p:spTree>
+    <p:extLst>
+      <p:ext uri="{BB962C8B-B14F-4D97-AF65-F5344CB8AC3E}">
+        <p14:creationId xmlns:p14="http://schemas.microsoft.com/office/powerpoint/2010/main" val="2589220141"/>
+      </p:ext>
+    </p:extLst>
+  </p:cSld>
+  <p:clrMapOvr>
+    <a:masterClrMapping/>
+  </p:clrMapOvr>
+</p:sld>
+</file>
+
+<file path=ppt/slides/slide22.xml><?xml version="1.0" encoding="utf-8"?>
+<p:sld xmlns:a="http://schemas.openxmlformats.org/drawingml/2006/main" xmlns:r="http://schemas.openxmlformats.org/officeDocument/2006/relationships" xmlns:p="http://schemas.openxmlformats.org/presentationml/2006/main">
+  <p:cSld>
+    <p:spTree>
+      <p:nvGrpSpPr>
+        <p:cNvPr id="1" name=""/>
+        <p:cNvGrpSpPr/>
+        <p:nvPr/>
+      </p:nvGrpSpPr>
+      <p:grpSpPr>
+        <a:xfrm>
+          <a:off x="0" y="0"/>
+          <a:ext cx="0" cy="0"/>
+          <a:chOff x="0" y="0"/>
+          <a:chExt cx="0" cy="0"/>
+        </a:xfrm>
+      </p:grpSpPr>
+      <p:sp>
+        <p:nvSpPr>
+          <p:cNvPr id="2" name="Title 1">
+            <a:extLst>
+              <a:ext uri="{FF2B5EF4-FFF2-40B4-BE49-F238E27FC236}">
+                <a16:creationId xmlns:a16="http://schemas.microsoft.com/office/drawing/2014/main" id="{442BB337-C7B3-A689-53AC-94686B3EEC8D}"/>
+              </a:ext>
+            </a:extLst>
+          </p:cNvPr>
+          <p:cNvSpPr>
+            <a:spLocks noGrp="1"/>
+          </p:cNvSpPr>
+          <p:nvPr>
+            <p:ph type="title"/>
+          </p:nvPr>
+        </p:nvSpPr>
+        <p:spPr/>
+        <p:txBody>
+          <a:bodyPr/>
+          <a:lstStyle/>
+          <a:p>
+            <a:endParaRPr lang="en-IN"/>
+          </a:p>
+        </p:txBody>
+      </p:sp>
+      <p:sp>
+        <p:nvSpPr>
+          <p:cNvPr id="3" name="Text Placeholder 2">
+            <a:extLst>
+              <a:ext uri="{FF2B5EF4-FFF2-40B4-BE49-F238E27FC236}">
+                <a16:creationId xmlns:a16="http://schemas.microsoft.com/office/drawing/2014/main" id="{F0061976-A467-FA0D-C40D-DA060966A1CA}"/>
+              </a:ext>
+            </a:extLst>
+          </p:cNvPr>
+          <p:cNvSpPr>
+            <a:spLocks noGrp="1"/>
+          </p:cNvSpPr>
+          <p:nvPr>
+            <p:ph type="body" idx="1"/>
+          </p:nvPr>
+        </p:nvSpPr>
+        <p:spPr/>
+        <p:txBody>
+          <a:bodyPr/>
+          <a:lstStyle/>
+          <a:p>
+            <a:endParaRPr lang="en-IN" dirty="0"/>
+          </a:p>
+        </p:txBody>
+      </p:sp>
+      <p:sp>
+        <p:nvSpPr>
+          <p:cNvPr id="5" name="Text Placeholder 4">
+            <a:extLst>
+              <a:ext uri="{FF2B5EF4-FFF2-40B4-BE49-F238E27FC236}">
+                <a16:creationId xmlns:a16="http://schemas.microsoft.com/office/drawing/2014/main" id="{A6654B79-FFC4-7B6C-875F-81F0E7AB845F}"/>
+              </a:ext>
+            </a:extLst>
+          </p:cNvPr>
+          <p:cNvSpPr txBox="1">
+            <a:spLocks/>
+          </p:cNvSpPr>
+          <p:nvPr/>
+        </p:nvSpPr>
+        <p:spPr>
+          <a:xfrm>
+            <a:off x="304800" y="283142"/>
+            <a:ext cx="8382000" cy="817245"/>
+          </a:xfrm>
+          <a:prstGeom prst="roundRect">
+            <a:avLst/>
+          </a:prstGeom>
+        </p:spPr>
+        <p:style>
+          <a:lnRef idx="1">
+            <a:schemeClr val="accent1"/>
+          </a:lnRef>
+          <a:fillRef idx="2">
+            <a:schemeClr val="accent1"/>
+          </a:fillRef>
+          <a:effectRef idx="1">
+            <a:schemeClr val="accent1"/>
+          </a:effectRef>
+          <a:fontRef idx="minor">
+            <a:schemeClr val="dk1"/>
+          </a:fontRef>
+        </p:style>
+        <p:txBody>
+          <a:bodyPr wrap="square" lIns="0" tIns="0" rIns="0" bIns="0" rtlCol="0" anchor="ctr">
+            <a:spAutoFit/>
+          </a:bodyPr>
+          <a:lstStyle>
+            <a:lvl1pPr marL="0">
+              <a:defRPr>
+                <a:solidFill>
+                  <a:schemeClr val="dk1"/>
+                </a:solidFill>
+                <a:latin typeface="+mn-lt"/>
+                <a:ea typeface="+mn-ea"/>
+                <a:cs typeface="+mn-cs"/>
+              </a:defRPr>
+            </a:lvl1pPr>
+            <a:lvl2pPr marL="457200">
+              <a:defRPr>
+                <a:solidFill>
+                  <a:schemeClr val="dk1"/>
+                </a:solidFill>
+                <a:latin typeface="+mn-lt"/>
+                <a:ea typeface="+mn-ea"/>
+                <a:cs typeface="+mn-cs"/>
+              </a:defRPr>
+            </a:lvl2pPr>
+            <a:lvl3pPr marL="914400">
+              <a:defRPr>
+                <a:solidFill>
+                  <a:schemeClr val="dk1"/>
+                </a:solidFill>
+                <a:latin typeface="+mn-lt"/>
+                <a:ea typeface="+mn-ea"/>
+                <a:cs typeface="+mn-cs"/>
+              </a:defRPr>
+            </a:lvl3pPr>
+            <a:lvl4pPr marL="1371600">
+              <a:defRPr>
+                <a:solidFill>
+                  <a:schemeClr val="dk1"/>
+                </a:solidFill>
+                <a:latin typeface="+mn-lt"/>
+                <a:ea typeface="+mn-ea"/>
+                <a:cs typeface="+mn-cs"/>
+              </a:defRPr>
+            </a:lvl4pPr>
+            <a:lvl5pPr marL="1828800">
+              <a:defRPr>
+                <a:solidFill>
+                  <a:schemeClr val="dk1"/>
+                </a:solidFill>
+                <a:latin typeface="+mn-lt"/>
+                <a:ea typeface="+mn-ea"/>
+                <a:cs typeface="+mn-cs"/>
+              </a:defRPr>
+            </a:lvl5pPr>
+            <a:lvl6pPr marL="2286000">
+              <a:defRPr>
+                <a:solidFill>
+                  <a:schemeClr val="dk1"/>
+                </a:solidFill>
+                <a:latin typeface="+mn-lt"/>
+                <a:ea typeface="+mn-ea"/>
+                <a:cs typeface="+mn-cs"/>
+              </a:defRPr>
+            </a:lvl6pPr>
+            <a:lvl7pPr marL="2743200">
+              <a:defRPr>
+                <a:solidFill>
+                  <a:schemeClr val="dk1"/>
+                </a:solidFill>
+                <a:latin typeface="+mn-lt"/>
+                <a:ea typeface="+mn-ea"/>
+                <a:cs typeface="+mn-cs"/>
+              </a:defRPr>
+            </a:lvl7pPr>
+            <a:lvl8pPr marL="3200400">
+              <a:defRPr>
+                <a:solidFill>
+                  <a:schemeClr val="dk1"/>
+                </a:solidFill>
+                <a:latin typeface="+mn-lt"/>
+                <a:ea typeface="+mn-ea"/>
+                <a:cs typeface="+mn-cs"/>
+              </a:defRPr>
+            </a:lvl8pPr>
+            <a:lvl9pPr marL="3657600">
+              <a:defRPr>
+                <a:solidFill>
+                  <a:schemeClr val="dk1"/>
+                </a:solidFill>
+                <a:latin typeface="+mn-lt"/>
+                <a:ea typeface="+mn-ea"/>
+                <a:cs typeface="+mn-cs"/>
+              </a:defRPr>
+            </a:lvl9pPr>
+          </a:lstStyle>
+          <a:p>
+            <a:pPr algn="ctr"/>
+            <a:r>
+              <a:rPr lang="en-US" sz="4800" b="1" dirty="0">
+                <a:ln w="12700">
+                  <a:solidFill>
+                    <a:schemeClr val="accent5"/>
+                  </a:solidFill>
+                  <a:prstDash val="solid"/>
+                </a:ln>
+                <a:pattFill prst="ltDnDiag">
+                  <a:fgClr>
+                    <a:schemeClr val="accent5">
+                      <a:lumMod val="60000"/>
+                      <a:lumOff val="40000"/>
+                    </a:schemeClr>
+                  </a:fgClr>
+                  <a:bgClr>
+                    <a:schemeClr val="bg1"/>
+                  </a:bgClr>
+                </a:pattFill>
+                <a:latin typeface="Times New Roman" panose="02020603050405020304" pitchFamily="18" charset="0"/>
+                <a:cs typeface="Times New Roman" panose="02020603050405020304" pitchFamily="18" charset="0"/>
+              </a:rPr>
+              <a:t>From Code to Creation</a:t>
+            </a:r>
+            <a:endParaRPr lang="en-IN" sz="4800" b="1" dirty="0">
+              <a:ln w="12700">
+                <a:solidFill>
+                  <a:schemeClr val="accent5"/>
+                </a:solidFill>
+                <a:prstDash val="solid"/>
+              </a:ln>
+              <a:pattFill prst="ltDnDiag">
+                <a:fgClr>
+                  <a:schemeClr val="accent5">
+                    <a:lumMod val="60000"/>
+                    <a:lumOff val="40000"/>
+                  </a:schemeClr>
+                </a:fgClr>
+                <a:bgClr>
+                  <a:schemeClr val="bg1"/>
+                </a:bgClr>
+              </a:pattFill>
+              <a:latin typeface="Times New Roman" panose="02020603050405020304" pitchFamily="18" charset="0"/>
+              <a:cs typeface="Times New Roman" panose="02020603050405020304" pitchFamily="18" charset="0"/>
+            </a:endParaRPr>
+          </a:p>
+        </p:txBody>
+      </p:sp>
+      <p:pic>
+        <p:nvPicPr>
+          <p:cNvPr id="7" name="Picture 6">
+            <a:extLst>
+              <a:ext uri="{FF2B5EF4-FFF2-40B4-BE49-F238E27FC236}">
+                <a16:creationId xmlns:a16="http://schemas.microsoft.com/office/drawing/2014/main" id="{F2CA29B7-D968-3D45-3F86-4CFAFA1F97B9}"/>
+              </a:ext>
+            </a:extLst>
+          </p:cNvPr>
+          <p:cNvPicPr>
+            <a:picLocks noChangeAspect="1"/>
+          </p:cNvPicPr>
+          <p:nvPr/>
+        </p:nvPicPr>
+        <p:blipFill>
+          <a:blip r:embed="rId2" cstate="print">
+            <a:extLst>
+              <a:ext uri="{28A0092B-C50C-407E-A947-70E740481C1C}">
+                <a14:useLocalDpi xmlns:a14="http://schemas.microsoft.com/office/drawing/2010/main" val="0"/>
+              </a:ext>
+            </a:extLst>
+          </a:blip>
+          <a:stretch>
+            <a:fillRect/>
+          </a:stretch>
+        </p:blipFill>
+        <p:spPr>
+          <a:xfrm>
+            <a:off x="304800" y="283141"/>
+            <a:ext cx="990600" cy="817245"/>
+          </a:xfrm>
+          <a:prstGeom prst="rect">
+            <a:avLst/>
+          </a:prstGeom>
+        </p:spPr>
+      </p:pic>
+      <p:pic>
+        <p:nvPicPr>
+          <p:cNvPr id="11" name="Picture 10">
+            <a:extLst>
+              <a:ext uri="{FF2B5EF4-FFF2-40B4-BE49-F238E27FC236}">
+                <a16:creationId xmlns:a16="http://schemas.microsoft.com/office/drawing/2014/main" id="{1374F143-98C8-BEF1-3F6C-B7ABE7578E9C}"/>
+              </a:ext>
+            </a:extLst>
+          </p:cNvPr>
+          <p:cNvPicPr>
+            <a:picLocks noChangeAspect="1"/>
+          </p:cNvPicPr>
+          <p:nvPr/>
+        </p:nvPicPr>
+        <p:blipFill>
+          <a:blip r:embed="rId3"/>
+          <a:stretch>
+            <a:fillRect/>
+          </a:stretch>
+        </p:blipFill>
+        <p:spPr>
+          <a:xfrm>
+            <a:off x="492977" y="1577636"/>
+            <a:ext cx="8193823" cy="4539231"/>
+          </a:xfrm>
+          <a:prstGeom prst="rect">
+            <a:avLst/>
+          </a:prstGeom>
+        </p:spPr>
+      </p:pic>
+    </p:spTree>
+    <p:extLst>
+      <p:ext uri="{BB962C8B-B14F-4D97-AF65-F5344CB8AC3E}">
+        <p14:creationId xmlns:p14="http://schemas.microsoft.com/office/powerpoint/2010/main" val="2391128237"/>
+      </p:ext>
+    </p:extLst>
+  </p:cSld>
+  <p:clrMapOvr>
+    <a:masterClrMapping/>
+  </p:clrMapOvr>
+</p:sld>
+</file>
+
+<file path=ppt/slides/slide23.xml><?xml version="1.0" encoding="utf-8"?>
+<p:sld xmlns:a="http://schemas.openxmlformats.org/drawingml/2006/main" xmlns:r="http://schemas.openxmlformats.org/officeDocument/2006/relationships" xmlns:p="http://schemas.openxmlformats.org/presentationml/2006/main">
+  <p:cSld>
+    <p:spTree>
+      <p:nvGrpSpPr>
+        <p:cNvPr id="1" name=""/>
+        <p:cNvGrpSpPr/>
+        <p:nvPr/>
+      </p:nvGrpSpPr>
+      <p:grpSpPr>
+        <a:xfrm>
+          <a:off x="0" y="0"/>
+          <a:ext cx="0" cy="0"/>
+          <a:chOff x="0" y="0"/>
+          <a:chExt cx="0" cy="0"/>
+        </a:xfrm>
+      </p:grpSpPr>
+      <p:sp>
+        <p:nvSpPr>
+          <p:cNvPr id="2" name="Title 1">
+            <a:extLst>
+              <a:ext uri="{FF2B5EF4-FFF2-40B4-BE49-F238E27FC236}">
+                <a16:creationId xmlns:a16="http://schemas.microsoft.com/office/drawing/2014/main" id="{4F02EF3B-E28C-ED8C-9212-D60CAAD3CBA7}"/>
+              </a:ext>
+            </a:extLst>
+          </p:cNvPr>
+          <p:cNvSpPr>
+            <a:spLocks noGrp="1"/>
+          </p:cNvSpPr>
+          <p:nvPr>
+            <p:ph type="title"/>
+          </p:nvPr>
+        </p:nvSpPr>
+        <p:spPr/>
+        <p:txBody>
+          <a:bodyPr/>
+          <a:lstStyle/>
+          <a:p>
+            <a:endParaRPr lang="en-IN"/>
+          </a:p>
+        </p:txBody>
+      </p:sp>
+      <p:sp>
+        <p:nvSpPr>
+          <p:cNvPr id="3" name="Text Placeholder 2">
+            <a:extLst>
+              <a:ext uri="{FF2B5EF4-FFF2-40B4-BE49-F238E27FC236}">
+                <a16:creationId xmlns:a16="http://schemas.microsoft.com/office/drawing/2014/main" id="{28E51EDA-EA9E-7F70-3ECA-B4F982E4E3EE}"/>
+              </a:ext>
+            </a:extLst>
+          </p:cNvPr>
+          <p:cNvSpPr>
+            <a:spLocks noGrp="1"/>
+          </p:cNvSpPr>
+          <p:nvPr>
+            <p:ph type="body" idx="1"/>
+          </p:nvPr>
+        </p:nvSpPr>
+        <p:spPr/>
+        <p:txBody>
+          <a:bodyPr/>
+          <a:lstStyle/>
+          <a:p>
+            <a:endParaRPr lang="en-IN" dirty="0"/>
+          </a:p>
+        </p:txBody>
+      </p:sp>
+      <p:sp>
+        <p:nvSpPr>
+          <p:cNvPr id="5" name="Text Placeholder 4">
+            <a:extLst>
+              <a:ext uri="{FF2B5EF4-FFF2-40B4-BE49-F238E27FC236}">
+                <a16:creationId xmlns:a16="http://schemas.microsoft.com/office/drawing/2014/main" id="{28DCF19E-575D-4A66-858D-7AC343F8A688}"/>
+              </a:ext>
+            </a:extLst>
+          </p:cNvPr>
+          <p:cNvSpPr txBox="1">
+            <a:spLocks/>
+          </p:cNvSpPr>
+          <p:nvPr/>
+        </p:nvSpPr>
+        <p:spPr>
+          <a:xfrm>
+            <a:off x="304800" y="283142"/>
+            <a:ext cx="7467600" cy="817245"/>
+          </a:xfrm>
+          <a:prstGeom prst="roundRect">
+            <a:avLst/>
+          </a:prstGeom>
+        </p:spPr>
+        <p:style>
+          <a:lnRef idx="1">
+            <a:schemeClr val="accent1"/>
+          </a:lnRef>
+          <a:fillRef idx="2">
+            <a:schemeClr val="accent1"/>
+          </a:fillRef>
+          <a:effectRef idx="1">
+            <a:schemeClr val="accent1"/>
+          </a:effectRef>
+          <a:fontRef idx="minor">
+            <a:schemeClr val="dk1"/>
+          </a:fontRef>
+        </p:style>
+        <p:txBody>
+          <a:bodyPr wrap="square" lIns="0" tIns="0" rIns="0" bIns="0" rtlCol="0" anchor="ctr">
+            <a:spAutoFit/>
+          </a:bodyPr>
+          <a:lstStyle>
+            <a:lvl1pPr marL="0">
+              <a:defRPr>
+                <a:solidFill>
+                  <a:schemeClr val="dk1"/>
+                </a:solidFill>
+                <a:latin typeface="+mn-lt"/>
+                <a:ea typeface="+mn-ea"/>
+                <a:cs typeface="+mn-cs"/>
+              </a:defRPr>
+            </a:lvl1pPr>
+            <a:lvl2pPr marL="457200">
+              <a:defRPr>
+                <a:solidFill>
+                  <a:schemeClr val="dk1"/>
+                </a:solidFill>
+                <a:latin typeface="+mn-lt"/>
+                <a:ea typeface="+mn-ea"/>
+                <a:cs typeface="+mn-cs"/>
+              </a:defRPr>
+            </a:lvl2pPr>
+            <a:lvl3pPr marL="914400">
+              <a:defRPr>
+                <a:solidFill>
+                  <a:schemeClr val="dk1"/>
+                </a:solidFill>
+                <a:latin typeface="+mn-lt"/>
+                <a:ea typeface="+mn-ea"/>
+                <a:cs typeface="+mn-cs"/>
+              </a:defRPr>
+            </a:lvl3pPr>
+            <a:lvl4pPr marL="1371600">
+              <a:defRPr>
+                <a:solidFill>
+                  <a:schemeClr val="dk1"/>
+                </a:solidFill>
+                <a:latin typeface="+mn-lt"/>
+                <a:ea typeface="+mn-ea"/>
+                <a:cs typeface="+mn-cs"/>
+              </a:defRPr>
+            </a:lvl4pPr>
+            <a:lvl5pPr marL="1828800">
+              <a:defRPr>
+                <a:solidFill>
+                  <a:schemeClr val="dk1"/>
+                </a:solidFill>
+                <a:latin typeface="+mn-lt"/>
+                <a:ea typeface="+mn-ea"/>
+                <a:cs typeface="+mn-cs"/>
+              </a:defRPr>
+            </a:lvl5pPr>
+            <a:lvl6pPr marL="2286000">
+              <a:defRPr>
+                <a:solidFill>
+                  <a:schemeClr val="dk1"/>
+                </a:solidFill>
+                <a:latin typeface="+mn-lt"/>
+                <a:ea typeface="+mn-ea"/>
+                <a:cs typeface="+mn-cs"/>
+              </a:defRPr>
+            </a:lvl6pPr>
+            <a:lvl7pPr marL="2743200">
+              <a:defRPr>
+                <a:solidFill>
+                  <a:schemeClr val="dk1"/>
+                </a:solidFill>
+                <a:latin typeface="+mn-lt"/>
+                <a:ea typeface="+mn-ea"/>
+                <a:cs typeface="+mn-cs"/>
+              </a:defRPr>
+            </a:lvl7pPr>
+            <a:lvl8pPr marL="3200400">
+              <a:defRPr>
+                <a:solidFill>
+                  <a:schemeClr val="dk1"/>
+                </a:solidFill>
+                <a:latin typeface="+mn-lt"/>
+                <a:ea typeface="+mn-ea"/>
+                <a:cs typeface="+mn-cs"/>
+              </a:defRPr>
+            </a:lvl8pPr>
+            <a:lvl9pPr marL="3657600">
+              <a:defRPr>
+                <a:solidFill>
+                  <a:schemeClr val="dk1"/>
+                </a:solidFill>
+                <a:latin typeface="+mn-lt"/>
+                <a:ea typeface="+mn-ea"/>
+                <a:cs typeface="+mn-cs"/>
+              </a:defRPr>
+            </a:lvl9pPr>
+          </a:lstStyle>
+          <a:p>
+            <a:pPr algn="ctr"/>
+            <a:r>
+              <a:rPr lang="en-US" sz="4800" b="1" dirty="0">
+                <a:ln w="12700">
+                  <a:solidFill>
+                    <a:schemeClr val="accent5"/>
+                  </a:solidFill>
+                  <a:prstDash val="solid"/>
+                </a:ln>
+                <a:pattFill prst="ltDnDiag">
+                  <a:fgClr>
+                    <a:schemeClr val="accent5">
+                      <a:lumMod val="60000"/>
+                      <a:lumOff val="40000"/>
+                    </a:schemeClr>
+                  </a:fgClr>
+                  <a:bgClr>
+                    <a:schemeClr val="bg1"/>
+                  </a:bgClr>
+                </a:pattFill>
+                <a:latin typeface="Times New Roman" panose="02020603050405020304" pitchFamily="18" charset="0"/>
+                <a:cs typeface="Times New Roman" panose="02020603050405020304" pitchFamily="18" charset="0"/>
+              </a:rPr>
+              <a:t>Output And Testing</a:t>
+            </a:r>
+            <a:endParaRPr lang="en-IN" sz="4800" b="1" dirty="0">
+              <a:ln w="12700">
+                <a:solidFill>
+                  <a:schemeClr val="accent5"/>
+                </a:solidFill>
+                <a:prstDash val="solid"/>
+              </a:ln>
+              <a:pattFill prst="ltDnDiag">
+                <a:fgClr>
+                  <a:schemeClr val="accent5">
+                    <a:lumMod val="60000"/>
+                    <a:lumOff val="40000"/>
+                  </a:schemeClr>
+                </a:fgClr>
+                <a:bgClr>
+                  <a:schemeClr val="bg1"/>
+                </a:bgClr>
+              </a:pattFill>
+              <a:latin typeface="Times New Roman" panose="02020603050405020304" pitchFamily="18" charset="0"/>
+              <a:cs typeface="Times New Roman" panose="02020603050405020304" pitchFamily="18" charset="0"/>
+            </a:endParaRPr>
+          </a:p>
+        </p:txBody>
+      </p:sp>
+      <p:pic>
+        <p:nvPicPr>
+          <p:cNvPr id="7" name="Picture 6">
+            <a:extLst>
+              <a:ext uri="{FF2B5EF4-FFF2-40B4-BE49-F238E27FC236}">
+                <a16:creationId xmlns:a16="http://schemas.microsoft.com/office/drawing/2014/main" id="{66BF3C1C-1AF7-F130-ED93-F62EBA4BEE10}"/>
+              </a:ext>
+            </a:extLst>
+          </p:cNvPr>
+          <p:cNvPicPr>
+            <a:picLocks noChangeAspect="1"/>
+          </p:cNvPicPr>
+          <p:nvPr/>
+        </p:nvPicPr>
+        <p:blipFill>
+          <a:blip r:embed="rId2" cstate="print">
+            <a:extLst>
+              <a:ext uri="{28A0092B-C50C-407E-A947-70E740481C1C}">
+                <a14:useLocalDpi xmlns:a14="http://schemas.microsoft.com/office/drawing/2010/main" val="0"/>
+              </a:ext>
+            </a:extLst>
+          </a:blip>
+          <a:stretch>
+            <a:fillRect/>
+          </a:stretch>
+        </p:blipFill>
+        <p:spPr>
+          <a:xfrm>
+            <a:off x="304800" y="283141"/>
+            <a:ext cx="990600" cy="817245"/>
+          </a:xfrm>
+          <a:prstGeom prst="rect">
+            <a:avLst/>
+          </a:prstGeom>
+        </p:spPr>
+      </p:pic>
+      <p:pic>
+        <p:nvPicPr>
+          <p:cNvPr id="11" name="Picture 10">
+            <a:extLst>
+              <a:ext uri="{FF2B5EF4-FFF2-40B4-BE49-F238E27FC236}">
+                <a16:creationId xmlns:a16="http://schemas.microsoft.com/office/drawing/2014/main" id="{95C126AA-4646-1D28-AA6A-58520E468C0C}"/>
+              </a:ext>
+            </a:extLst>
+          </p:cNvPr>
+          <p:cNvPicPr>
+            <a:picLocks noChangeAspect="1"/>
+          </p:cNvPicPr>
+          <p:nvPr/>
+        </p:nvPicPr>
+        <p:blipFill>
+          <a:blip r:embed="rId3"/>
+          <a:stretch>
+            <a:fillRect/>
+          </a:stretch>
+        </p:blipFill>
+        <p:spPr>
+          <a:xfrm>
+            <a:off x="449423" y="1550902"/>
+            <a:ext cx="8142387" cy="4316498"/>
+          </a:xfrm>
+          <a:prstGeom prst="rect">
+            <a:avLst/>
+          </a:prstGeom>
+        </p:spPr>
+      </p:pic>
+    </p:spTree>
+    <p:extLst>
+      <p:ext uri="{BB962C8B-B14F-4D97-AF65-F5344CB8AC3E}">
+        <p14:creationId xmlns:p14="http://schemas.microsoft.com/office/powerpoint/2010/main" val="3076987856"/>
+      </p:ext>
+    </p:extLst>
+  </p:cSld>
+  <p:clrMapOvr>
+    <a:masterClrMapping/>
+  </p:clrMapOvr>
+</p:sld>
+</file>
+
+<file path=ppt/slides/slide24.xml><?xml version="1.0" encoding="utf-8"?>
+<p:sld xmlns:a="http://schemas.openxmlformats.org/drawingml/2006/main" xmlns:r="http://schemas.openxmlformats.org/officeDocument/2006/relationships" xmlns:p="http://schemas.openxmlformats.org/presentationml/2006/main">
+  <p:cSld>
+    <p:spTree>
+      <p:nvGrpSpPr>
+        <p:cNvPr id="1" name=""/>
+        <p:cNvGrpSpPr/>
+        <p:nvPr/>
+      </p:nvGrpSpPr>
+      <p:grpSpPr>
+        <a:xfrm>
+          <a:off x="0" y="0"/>
+          <a:ext cx="0" cy="0"/>
+          <a:chOff x="0" y="0"/>
+          <a:chExt cx="0" cy="0"/>
+        </a:xfrm>
+      </p:grpSpPr>
+      <p:sp>
+        <p:nvSpPr>
+          <p:cNvPr id="2" name="Title 1">
+            <a:extLst>
+              <a:ext uri="{FF2B5EF4-FFF2-40B4-BE49-F238E27FC236}">
+                <a16:creationId xmlns:a16="http://schemas.microsoft.com/office/drawing/2014/main" id="{4924549C-6EDE-23CC-07FA-5A4A2FFEC422}"/>
+              </a:ext>
+            </a:extLst>
+          </p:cNvPr>
+          <p:cNvSpPr>
+            <a:spLocks noGrp="1"/>
+          </p:cNvSpPr>
+          <p:nvPr>
+            <p:ph type="title"/>
+          </p:nvPr>
+        </p:nvSpPr>
+        <p:spPr/>
+        <p:txBody>
+          <a:bodyPr/>
+          <a:lstStyle/>
+          <a:p>
+            <a:endParaRPr lang="en-IN"/>
+          </a:p>
+        </p:txBody>
+      </p:sp>
+      <p:sp>
+        <p:nvSpPr>
+          <p:cNvPr id="3" name="Text Placeholder 2">
+            <a:extLst>
+              <a:ext uri="{FF2B5EF4-FFF2-40B4-BE49-F238E27FC236}">
+                <a16:creationId xmlns:a16="http://schemas.microsoft.com/office/drawing/2014/main" id="{6EBE9C61-8842-E747-5D1D-79DB9210DA0B}"/>
+              </a:ext>
+            </a:extLst>
+          </p:cNvPr>
+          <p:cNvSpPr>
+            <a:spLocks noGrp="1"/>
+          </p:cNvSpPr>
+          <p:nvPr>
+            <p:ph type="body" idx="1"/>
+          </p:nvPr>
+        </p:nvSpPr>
+        <p:spPr/>
+        <p:txBody>
+          <a:bodyPr/>
+          <a:lstStyle/>
+          <a:p>
+            <a:endParaRPr lang="en-IN" dirty="0"/>
+          </a:p>
+        </p:txBody>
+      </p:sp>
+      <p:sp>
+        <p:nvSpPr>
+          <p:cNvPr id="7" name="Text Placeholder 4">
+            <a:extLst>
+              <a:ext uri="{FF2B5EF4-FFF2-40B4-BE49-F238E27FC236}">
+                <a16:creationId xmlns:a16="http://schemas.microsoft.com/office/drawing/2014/main" id="{C50B7EEA-EF08-7E5C-4AD2-47161BE7BD29}"/>
+              </a:ext>
+            </a:extLst>
+          </p:cNvPr>
+          <p:cNvSpPr txBox="1">
+            <a:spLocks/>
+          </p:cNvSpPr>
+          <p:nvPr/>
+        </p:nvSpPr>
+        <p:spPr>
+          <a:xfrm>
+            <a:off x="304800" y="283142"/>
+            <a:ext cx="7467600" cy="817245"/>
+          </a:xfrm>
+          <a:prstGeom prst="roundRect">
+            <a:avLst/>
+          </a:prstGeom>
+        </p:spPr>
+        <p:style>
+          <a:lnRef idx="1">
+            <a:schemeClr val="accent1"/>
+          </a:lnRef>
+          <a:fillRef idx="2">
+            <a:schemeClr val="accent1"/>
+          </a:fillRef>
+          <a:effectRef idx="1">
+            <a:schemeClr val="accent1"/>
+          </a:effectRef>
+          <a:fontRef idx="minor">
+            <a:schemeClr val="dk1"/>
+          </a:fontRef>
+        </p:style>
+        <p:txBody>
+          <a:bodyPr wrap="square" lIns="0" tIns="0" rIns="0" bIns="0" rtlCol="0" anchor="ctr">
+            <a:spAutoFit/>
+          </a:bodyPr>
+          <a:lstStyle>
+            <a:lvl1pPr marL="0">
+              <a:defRPr>
+                <a:solidFill>
+                  <a:schemeClr val="dk1"/>
+                </a:solidFill>
+                <a:latin typeface="+mn-lt"/>
+                <a:ea typeface="+mn-ea"/>
+                <a:cs typeface="+mn-cs"/>
+              </a:defRPr>
+            </a:lvl1pPr>
+            <a:lvl2pPr marL="457200">
+              <a:defRPr>
+                <a:solidFill>
+                  <a:schemeClr val="dk1"/>
+                </a:solidFill>
+                <a:latin typeface="+mn-lt"/>
+                <a:ea typeface="+mn-ea"/>
+                <a:cs typeface="+mn-cs"/>
+              </a:defRPr>
+            </a:lvl2pPr>
+            <a:lvl3pPr marL="914400">
+              <a:defRPr>
+                <a:solidFill>
+                  <a:schemeClr val="dk1"/>
+                </a:solidFill>
+                <a:latin typeface="+mn-lt"/>
+                <a:ea typeface="+mn-ea"/>
+                <a:cs typeface="+mn-cs"/>
+              </a:defRPr>
+            </a:lvl3pPr>
+            <a:lvl4pPr marL="1371600">
+              <a:defRPr>
+                <a:solidFill>
+                  <a:schemeClr val="dk1"/>
+                </a:solidFill>
+                <a:latin typeface="+mn-lt"/>
+                <a:ea typeface="+mn-ea"/>
+                <a:cs typeface="+mn-cs"/>
+              </a:defRPr>
+            </a:lvl4pPr>
+            <a:lvl5pPr marL="1828800">
+              <a:defRPr>
+                <a:solidFill>
+                  <a:schemeClr val="dk1"/>
+                </a:solidFill>
+                <a:latin typeface="+mn-lt"/>
+                <a:ea typeface="+mn-ea"/>
+                <a:cs typeface="+mn-cs"/>
+              </a:defRPr>
+            </a:lvl5pPr>
+            <a:lvl6pPr marL="2286000">
+              <a:defRPr>
+                <a:solidFill>
+                  <a:schemeClr val="dk1"/>
+                </a:solidFill>
+                <a:latin typeface="+mn-lt"/>
+                <a:ea typeface="+mn-ea"/>
+                <a:cs typeface="+mn-cs"/>
+              </a:defRPr>
+            </a:lvl6pPr>
+            <a:lvl7pPr marL="2743200">
+              <a:defRPr>
+                <a:solidFill>
+                  <a:schemeClr val="dk1"/>
+                </a:solidFill>
+                <a:latin typeface="+mn-lt"/>
+                <a:ea typeface="+mn-ea"/>
+                <a:cs typeface="+mn-cs"/>
+              </a:defRPr>
+            </a:lvl7pPr>
+            <a:lvl8pPr marL="3200400">
+              <a:defRPr>
+                <a:solidFill>
+                  <a:schemeClr val="dk1"/>
+                </a:solidFill>
+                <a:latin typeface="+mn-lt"/>
+                <a:ea typeface="+mn-ea"/>
+                <a:cs typeface="+mn-cs"/>
+              </a:defRPr>
+            </a:lvl8pPr>
+            <a:lvl9pPr marL="3657600">
+              <a:defRPr>
+                <a:solidFill>
+                  <a:schemeClr val="dk1"/>
+                </a:solidFill>
+                <a:latin typeface="+mn-lt"/>
+                <a:ea typeface="+mn-ea"/>
+                <a:cs typeface="+mn-cs"/>
+              </a:defRPr>
+            </a:lvl9pPr>
+          </a:lstStyle>
+          <a:p>
+            <a:pPr algn="ctr"/>
+            <a:r>
+              <a:rPr lang="en-US" sz="4800" b="1" dirty="0">
+                <a:ln w="12700">
+                  <a:solidFill>
+                    <a:schemeClr val="accent5"/>
+                  </a:solidFill>
+                  <a:prstDash val="solid"/>
+                </a:ln>
+                <a:pattFill prst="ltDnDiag">
+                  <a:fgClr>
+                    <a:schemeClr val="accent5">
+                      <a:lumMod val="60000"/>
+                      <a:lumOff val="40000"/>
+                    </a:schemeClr>
+                  </a:fgClr>
+                  <a:bgClr>
+                    <a:schemeClr val="bg1"/>
+                  </a:bgClr>
+                </a:pattFill>
+                <a:latin typeface="Times New Roman" panose="02020603050405020304" pitchFamily="18" charset="0"/>
+                <a:cs typeface="Times New Roman" panose="02020603050405020304" pitchFamily="18" charset="0"/>
+              </a:rPr>
+              <a:t>Strength Checker</a:t>
+            </a:r>
+            <a:endParaRPr lang="en-IN" sz="4800" b="1" dirty="0">
+              <a:ln w="12700">
+                <a:solidFill>
+                  <a:schemeClr val="accent5"/>
+                </a:solidFill>
+                <a:prstDash val="solid"/>
+              </a:ln>
+              <a:pattFill prst="ltDnDiag">
+                <a:fgClr>
+                  <a:schemeClr val="accent5">
+                    <a:lumMod val="60000"/>
+                    <a:lumOff val="40000"/>
+                  </a:schemeClr>
+                </a:fgClr>
+                <a:bgClr>
+                  <a:schemeClr val="bg1"/>
+                </a:bgClr>
+              </a:pattFill>
+              <a:latin typeface="Times New Roman" panose="02020603050405020304" pitchFamily="18" charset="0"/>
+              <a:cs typeface="Times New Roman" panose="02020603050405020304" pitchFamily="18" charset="0"/>
+            </a:endParaRPr>
+          </a:p>
+        </p:txBody>
+      </p:sp>
+      <p:pic>
+        <p:nvPicPr>
+          <p:cNvPr id="9" name="Picture 8">
+            <a:extLst>
+              <a:ext uri="{FF2B5EF4-FFF2-40B4-BE49-F238E27FC236}">
+                <a16:creationId xmlns:a16="http://schemas.microsoft.com/office/drawing/2014/main" id="{A9E9CC0A-940C-FBB3-8534-901F973068E6}"/>
+              </a:ext>
+            </a:extLst>
+          </p:cNvPr>
+          <p:cNvPicPr>
+            <a:picLocks noChangeAspect="1"/>
+          </p:cNvPicPr>
+          <p:nvPr/>
+        </p:nvPicPr>
+        <p:blipFill>
+          <a:blip r:embed="rId2" cstate="print">
+            <a:extLst>
+              <a:ext uri="{28A0092B-C50C-407E-A947-70E740481C1C}">
+                <a14:useLocalDpi xmlns:a14="http://schemas.microsoft.com/office/drawing/2010/main" val="0"/>
+              </a:ext>
+            </a:extLst>
+          </a:blip>
+          <a:stretch>
+            <a:fillRect/>
+          </a:stretch>
+        </p:blipFill>
+        <p:spPr>
+          <a:xfrm>
+            <a:off x="304800" y="283141"/>
+            <a:ext cx="990600" cy="817245"/>
+          </a:xfrm>
+          <a:prstGeom prst="rect">
+            <a:avLst/>
+          </a:prstGeom>
+        </p:spPr>
+      </p:pic>
+      <p:pic>
+        <p:nvPicPr>
+          <p:cNvPr id="11" name="Picture 10">
+            <a:extLst>
+              <a:ext uri="{FF2B5EF4-FFF2-40B4-BE49-F238E27FC236}">
+                <a16:creationId xmlns:a16="http://schemas.microsoft.com/office/drawing/2014/main" id="{6AE129D3-C4E6-8ABA-A692-864D202590F1}"/>
+              </a:ext>
+            </a:extLst>
+          </p:cNvPr>
+          <p:cNvPicPr>
+            <a:picLocks noChangeAspect="1"/>
+          </p:cNvPicPr>
+          <p:nvPr/>
+        </p:nvPicPr>
+        <p:blipFill>
+          <a:blip r:embed="rId3"/>
+          <a:stretch>
+            <a:fillRect/>
+          </a:stretch>
+        </p:blipFill>
+        <p:spPr>
+          <a:xfrm>
+            <a:off x="304800" y="1448015"/>
+            <a:ext cx="8458200" cy="4800385"/>
+          </a:xfrm>
+          <a:prstGeom prst="rect">
+            <a:avLst/>
+          </a:prstGeom>
+        </p:spPr>
+      </p:pic>
+    </p:spTree>
+    <p:extLst>
+      <p:ext uri="{BB962C8B-B14F-4D97-AF65-F5344CB8AC3E}">
+        <p14:creationId xmlns:p14="http://schemas.microsoft.com/office/powerpoint/2010/main" val="2008037130"/>
+      </p:ext>
+    </p:extLst>
+  </p:cSld>
+  <p:clrMapOvr>
+    <a:masterClrMapping/>
+  </p:clrMapOvr>
+</p:sld>
+</file>
+
+<file path=ppt/slides/slide25.xml><?xml version="1.0" encoding="utf-8"?>
+<p:sld xmlns:a="http://schemas.openxmlformats.org/drawingml/2006/main" xmlns:r="http://schemas.openxmlformats.org/officeDocument/2006/relationships" xmlns:p="http://schemas.openxmlformats.org/presentationml/2006/main">
+  <p:cSld>
+    <p:spTree>
+      <p:nvGrpSpPr>
+        <p:cNvPr id="1" name=""/>
+        <p:cNvGrpSpPr/>
+        <p:nvPr/>
+      </p:nvGrpSpPr>
+      <p:grpSpPr>
+        <a:xfrm>
+          <a:off x="0" y="0"/>
+          <a:ext cx="0" cy="0"/>
+          <a:chOff x="0" y="0"/>
+          <a:chExt cx="0" cy="0"/>
+        </a:xfrm>
+      </p:grpSpPr>
+      <p:sp>
+        <p:nvSpPr>
+          <p:cNvPr id="2" name="Title 1">
+            <a:extLst>
+              <a:ext uri="{FF2B5EF4-FFF2-40B4-BE49-F238E27FC236}">
+                <a16:creationId xmlns:a16="http://schemas.microsoft.com/office/drawing/2014/main" id="{AD819D78-F04A-4455-B6AF-2F99D9857ECB}"/>
+              </a:ext>
+            </a:extLst>
+          </p:cNvPr>
+          <p:cNvSpPr>
+            <a:spLocks noGrp="1"/>
+          </p:cNvSpPr>
+          <p:nvPr>
+            <p:ph type="title"/>
+          </p:nvPr>
+        </p:nvSpPr>
+        <p:spPr/>
+        <p:txBody>
+          <a:bodyPr/>
+          <a:lstStyle/>
+          <a:p>
+            <a:endParaRPr lang="en-IN"/>
+          </a:p>
+        </p:txBody>
+      </p:sp>
+      <p:sp>
+        <p:nvSpPr>
+          <p:cNvPr id="3" name="Text Placeholder 2">
+            <a:extLst>
+              <a:ext uri="{FF2B5EF4-FFF2-40B4-BE49-F238E27FC236}">
+                <a16:creationId xmlns:a16="http://schemas.microsoft.com/office/drawing/2014/main" id="{6649941A-A6BE-9652-9D72-5E56CE1060FA}"/>
+              </a:ext>
+            </a:extLst>
+          </p:cNvPr>
+          <p:cNvSpPr>
+            <a:spLocks noGrp="1"/>
+          </p:cNvSpPr>
+          <p:nvPr>
+            <p:ph type="body" idx="1"/>
+          </p:nvPr>
+        </p:nvSpPr>
+        <p:spPr/>
+        <p:txBody>
+          <a:bodyPr/>
+          <a:lstStyle/>
+          <a:p>
+            <a:endParaRPr lang="en-IN" dirty="0"/>
+          </a:p>
+        </p:txBody>
+      </p:sp>
+      <p:sp>
+        <p:nvSpPr>
+          <p:cNvPr id="11" name="Text Placeholder 4">
+            <a:extLst>
+              <a:ext uri="{FF2B5EF4-FFF2-40B4-BE49-F238E27FC236}">
+                <a16:creationId xmlns:a16="http://schemas.microsoft.com/office/drawing/2014/main" id="{B3D98B02-2B96-BFC2-4CB5-6DB0EEF63755}"/>
+              </a:ext>
+            </a:extLst>
+          </p:cNvPr>
+          <p:cNvSpPr txBox="1">
+            <a:spLocks/>
+          </p:cNvSpPr>
+          <p:nvPr/>
+        </p:nvSpPr>
+        <p:spPr>
+          <a:xfrm>
+            <a:off x="152400" y="426402"/>
+            <a:ext cx="8763000" cy="681038"/>
+          </a:xfrm>
+          <a:prstGeom prst="roundRect">
+            <a:avLst/>
+          </a:prstGeom>
+        </p:spPr>
+        <p:style>
+          <a:lnRef idx="1">
+            <a:schemeClr val="accent1"/>
+          </a:lnRef>
+          <a:fillRef idx="2">
+            <a:schemeClr val="accent1"/>
+          </a:fillRef>
+          <a:effectRef idx="1">
+            <a:schemeClr val="accent1"/>
+          </a:effectRef>
+          <a:fontRef idx="minor">
+            <a:schemeClr val="dk1"/>
+          </a:fontRef>
+        </p:style>
+        <p:txBody>
+          <a:bodyPr wrap="square" lIns="0" tIns="0" rIns="0" bIns="0" rtlCol="0" anchor="ctr">
+            <a:spAutoFit/>
+          </a:bodyPr>
+          <a:lstStyle>
+            <a:lvl1pPr marL="0">
+              <a:defRPr>
+                <a:solidFill>
+                  <a:schemeClr val="dk1"/>
+                </a:solidFill>
+                <a:latin typeface="+mn-lt"/>
+                <a:ea typeface="+mn-ea"/>
+                <a:cs typeface="+mn-cs"/>
+              </a:defRPr>
+            </a:lvl1pPr>
+            <a:lvl2pPr marL="457200">
+              <a:defRPr>
+                <a:solidFill>
+                  <a:schemeClr val="dk1"/>
+                </a:solidFill>
+                <a:latin typeface="+mn-lt"/>
+                <a:ea typeface="+mn-ea"/>
+                <a:cs typeface="+mn-cs"/>
+              </a:defRPr>
+            </a:lvl2pPr>
+            <a:lvl3pPr marL="914400">
+              <a:defRPr>
+                <a:solidFill>
+                  <a:schemeClr val="dk1"/>
+                </a:solidFill>
+                <a:latin typeface="+mn-lt"/>
+                <a:ea typeface="+mn-ea"/>
+                <a:cs typeface="+mn-cs"/>
+              </a:defRPr>
+            </a:lvl3pPr>
+            <a:lvl4pPr marL="1371600">
+              <a:defRPr>
+                <a:solidFill>
+                  <a:schemeClr val="dk1"/>
+                </a:solidFill>
+                <a:latin typeface="+mn-lt"/>
+                <a:ea typeface="+mn-ea"/>
+                <a:cs typeface="+mn-cs"/>
+              </a:defRPr>
+            </a:lvl4pPr>
+            <a:lvl5pPr marL="1828800">
+              <a:defRPr>
+                <a:solidFill>
+                  <a:schemeClr val="dk1"/>
+                </a:solidFill>
+                <a:latin typeface="+mn-lt"/>
+                <a:ea typeface="+mn-ea"/>
+                <a:cs typeface="+mn-cs"/>
+              </a:defRPr>
+            </a:lvl5pPr>
+            <a:lvl6pPr marL="2286000">
+              <a:defRPr>
+                <a:solidFill>
+                  <a:schemeClr val="dk1"/>
+                </a:solidFill>
+                <a:latin typeface="+mn-lt"/>
+                <a:ea typeface="+mn-ea"/>
+                <a:cs typeface="+mn-cs"/>
+              </a:defRPr>
+            </a:lvl6pPr>
+            <a:lvl7pPr marL="2743200">
+              <a:defRPr>
+                <a:solidFill>
+                  <a:schemeClr val="dk1"/>
+                </a:solidFill>
+                <a:latin typeface="+mn-lt"/>
+                <a:ea typeface="+mn-ea"/>
+                <a:cs typeface="+mn-cs"/>
+              </a:defRPr>
+            </a:lvl7pPr>
+            <a:lvl8pPr marL="3200400">
+              <a:defRPr>
+                <a:solidFill>
+                  <a:schemeClr val="dk1"/>
+                </a:solidFill>
+                <a:latin typeface="+mn-lt"/>
+                <a:ea typeface="+mn-ea"/>
+                <a:cs typeface="+mn-cs"/>
+              </a:defRPr>
+            </a:lvl8pPr>
+            <a:lvl9pPr marL="3657600">
+              <a:defRPr>
+                <a:solidFill>
+                  <a:schemeClr val="dk1"/>
+                </a:solidFill>
+                <a:latin typeface="+mn-lt"/>
+                <a:ea typeface="+mn-ea"/>
+                <a:cs typeface="+mn-cs"/>
+              </a:defRPr>
+            </a:lvl9pPr>
+          </a:lstStyle>
+          <a:p>
+            <a:pPr algn="ctr"/>
+            <a:r>
+              <a:rPr lang="en-IN" sz="2000" dirty="0">
+                <a:solidFill>
+                  <a:schemeClr val="tx2"/>
+                </a:solidFill>
+                <a:latin typeface="Times New Roman" panose="02020603050405020304" pitchFamily="18" charset="0"/>
+                <a:cs typeface="Times New Roman" panose="02020603050405020304" pitchFamily="18" charset="0"/>
+              </a:rPr>
+              <a:t>                 GitHub</a:t>
+            </a:r>
+            <a:r>
+              <a:rPr lang="en-IN" sz="2000" spc="-50" dirty="0">
+                <a:solidFill>
+                  <a:schemeClr val="tx2"/>
+                </a:solidFill>
+                <a:latin typeface="Times New Roman" panose="02020603050405020304" pitchFamily="18" charset="0"/>
+                <a:cs typeface="Times New Roman" panose="02020603050405020304" pitchFamily="18" charset="0"/>
+              </a:rPr>
+              <a:t> </a:t>
+            </a:r>
+            <a:r>
+              <a:rPr lang="en-IN" sz="2000" spc="-10" dirty="0">
+                <a:solidFill>
+                  <a:schemeClr val="tx2"/>
+                </a:solidFill>
+                <a:latin typeface="Times New Roman" panose="02020603050405020304" pitchFamily="18" charset="0"/>
+                <a:cs typeface="Times New Roman" panose="02020603050405020304" pitchFamily="18" charset="0"/>
+              </a:rPr>
+              <a:t>account,</a:t>
+            </a:r>
+            <a:r>
+              <a:rPr lang="en-IN" sz="2000" spc="-45" dirty="0">
+                <a:solidFill>
+                  <a:schemeClr val="tx2"/>
+                </a:solidFill>
+                <a:latin typeface="Times New Roman" panose="02020603050405020304" pitchFamily="18" charset="0"/>
+                <a:cs typeface="Times New Roman" panose="02020603050405020304" pitchFamily="18" charset="0"/>
+              </a:rPr>
+              <a:t> </a:t>
+            </a:r>
+            <a:r>
+              <a:rPr lang="en-IN" sz="2000" spc="-10" dirty="0">
+                <a:solidFill>
+                  <a:schemeClr val="tx2"/>
+                </a:solidFill>
+                <a:latin typeface="Times New Roman" panose="02020603050405020304" pitchFamily="18" charset="0"/>
+                <a:cs typeface="Times New Roman" panose="02020603050405020304" pitchFamily="18" charset="0"/>
+              </a:rPr>
+              <a:t>repository</a:t>
+            </a:r>
+            <a:r>
+              <a:rPr lang="en-IN" sz="2000" spc="-45" dirty="0">
+                <a:solidFill>
+                  <a:schemeClr val="tx2"/>
+                </a:solidFill>
+                <a:latin typeface="Times New Roman" panose="02020603050405020304" pitchFamily="18" charset="0"/>
+                <a:cs typeface="Times New Roman" panose="02020603050405020304" pitchFamily="18" charset="0"/>
+              </a:rPr>
+              <a:t> </a:t>
+            </a:r>
+            <a:r>
+              <a:rPr lang="en-IN" sz="2000" spc="-10" dirty="0">
+                <a:solidFill>
+                  <a:schemeClr val="tx2"/>
+                </a:solidFill>
+                <a:latin typeface="Times New Roman" panose="02020603050405020304" pitchFamily="18" charset="0"/>
+                <a:cs typeface="Times New Roman" panose="02020603050405020304" pitchFamily="18" charset="0"/>
+              </a:rPr>
+              <a:t>creation,</a:t>
+            </a:r>
+            <a:r>
+              <a:rPr lang="en-IN" sz="2000" spc="-45" dirty="0">
+                <a:solidFill>
+                  <a:schemeClr val="tx2"/>
+                </a:solidFill>
+                <a:latin typeface="Times New Roman" panose="02020603050405020304" pitchFamily="18" charset="0"/>
+                <a:cs typeface="Times New Roman" panose="02020603050405020304" pitchFamily="18" charset="0"/>
+              </a:rPr>
+              <a:t> </a:t>
+            </a:r>
+            <a:r>
+              <a:rPr lang="en-IN" sz="2000" spc="-10" dirty="0">
+                <a:solidFill>
+                  <a:schemeClr val="tx2"/>
+                </a:solidFill>
+                <a:latin typeface="Times New Roman" panose="02020603050405020304" pitchFamily="18" charset="0"/>
+                <a:cs typeface="Times New Roman" panose="02020603050405020304" pitchFamily="18" charset="0"/>
+              </a:rPr>
+              <a:t>uploading</a:t>
+            </a:r>
+            <a:r>
+              <a:rPr lang="en-IN" sz="2000" spc="-45" dirty="0">
+                <a:solidFill>
+                  <a:schemeClr val="tx2"/>
+                </a:solidFill>
+                <a:latin typeface="Times New Roman" panose="02020603050405020304" pitchFamily="18" charset="0"/>
+                <a:cs typeface="Times New Roman" panose="02020603050405020304" pitchFamily="18" charset="0"/>
+              </a:rPr>
+              <a:t> </a:t>
+            </a:r>
+            <a:r>
+              <a:rPr lang="en-IN" sz="2000" dirty="0">
+                <a:solidFill>
+                  <a:schemeClr val="tx2"/>
+                </a:solidFill>
+                <a:latin typeface="Times New Roman" panose="02020603050405020304" pitchFamily="18" charset="0"/>
+                <a:cs typeface="Times New Roman" panose="02020603050405020304" pitchFamily="18" charset="0"/>
+              </a:rPr>
+              <a:t>code,</a:t>
+            </a:r>
+            <a:r>
+              <a:rPr lang="en-IN" sz="2000" spc="-50" dirty="0">
+                <a:solidFill>
+                  <a:schemeClr val="tx2"/>
+                </a:solidFill>
+                <a:latin typeface="Times New Roman" panose="02020603050405020304" pitchFamily="18" charset="0"/>
+                <a:cs typeface="Times New Roman" panose="02020603050405020304" pitchFamily="18" charset="0"/>
+              </a:rPr>
+              <a:t> </a:t>
+            </a:r>
+            <a:r>
+              <a:rPr lang="en-IN" sz="2000" spc="-10" dirty="0">
+                <a:solidFill>
+                  <a:schemeClr val="tx2"/>
+                </a:solidFill>
+                <a:latin typeface="Times New Roman" panose="02020603050405020304" pitchFamily="18" charset="0"/>
+                <a:cs typeface="Times New Roman" panose="02020603050405020304" pitchFamily="18" charset="0"/>
+              </a:rPr>
+              <a:t>meaningful</a:t>
+            </a:r>
+            <a:r>
+              <a:rPr lang="en-IN" sz="2000" spc="-45" dirty="0">
+                <a:solidFill>
+                  <a:schemeClr val="tx2"/>
+                </a:solidFill>
+                <a:latin typeface="Times New Roman" panose="02020603050405020304" pitchFamily="18" charset="0"/>
+                <a:cs typeface="Times New Roman" panose="02020603050405020304" pitchFamily="18" charset="0"/>
+              </a:rPr>
+              <a:t> </a:t>
+            </a:r>
+            <a:r>
+              <a:rPr lang="en-IN" sz="2000" spc="-10" dirty="0">
+                <a:solidFill>
+                  <a:schemeClr val="tx2"/>
+                </a:solidFill>
+                <a:latin typeface="Times New Roman" panose="02020603050405020304" pitchFamily="18" charset="0"/>
+                <a:cs typeface="Times New Roman" panose="02020603050405020304" pitchFamily="18" charset="0"/>
+              </a:rPr>
+              <a:t>commits, </a:t>
+            </a:r>
+            <a:r>
+              <a:rPr lang="en-IN" sz="2000" spc="-20" dirty="0">
+                <a:solidFill>
+                  <a:schemeClr val="tx2"/>
+                </a:solidFill>
+                <a:latin typeface="Times New Roman" panose="02020603050405020304" pitchFamily="18" charset="0"/>
+                <a:cs typeface="Times New Roman" panose="02020603050405020304" pitchFamily="18" charset="0"/>
+              </a:rPr>
+              <a:t>collaboration,</a:t>
+            </a:r>
+            <a:r>
+              <a:rPr lang="en-IN" sz="2000" spc="10" dirty="0">
+                <a:solidFill>
+                  <a:schemeClr val="tx2"/>
+                </a:solidFill>
+                <a:latin typeface="Times New Roman" panose="02020603050405020304" pitchFamily="18" charset="0"/>
+                <a:cs typeface="Times New Roman" panose="02020603050405020304" pitchFamily="18" charset="0"/>
+              </a:rPr>
+              <a:t> </a:t>
+            </a:r>
+            <a:r>
+              <a:rPr lang="en-IN" sz="2000" spc="-10" dirty="0">
+                <a:solidFill>
+                  <a:schemeClr val="tx2"/>
+                </a:solidFill>
+                <a:latin typeface="Times New Roman" panose="02020603050405020304" pitchFamily="18" charset="0"/>
+                <a:cs typeface="Times New Roman" panose="02020603050405020304" pitchFamily="18" charset="0"/>
+              </a:rPr>
+              <a:t>individual</a:t>
+            </a:r>
+            <a:r>
+              <a:rPr lang="en-IN" sz="2000" spc="10" dirty="0">
+                <a:solidFill>
+                  <a:schemeClr val="tx2"/>
+                </a:solidFill>
+                <a:latin typeface="Times New Roman" panose="02020603050405020304" pitchFamily="18" charset="0"/>
+                <a:cs typeface="Times New Roman" panose="02020603050405020304" pitchFamily="18" charset="0"/>
+              </a:rPr>
+              <a:t> </a:t>
+            </a:r>
+            <a:r>
+              <a:rPr lang="en-IN" sz="2000" spc="-10" dirty="0">
+                <a:solidFill>
+                  <a:schemeClr val="tx2"/>
+                </a:solidFill>
+                <a:latin typeface="Times New Roman" panose="02020603050405020304" pitchFamily="18" charset="0"/>
+                <a:cs typeface="Times New Roman" panose="02020603050405020304" pitchFamily="18" charset="0"/>
+              </a:rPr>
+              <a:t>contribution</a:t>
+            </a:r>
+            <a:endParaRPr lang="en-IN" sz="2000" b="1" dirty="0">
+              <a:ln w="12700">
+                <a:solidFill>
+                  <a:schemeClr val="accent5"/>
+                </a:solidFill>
+                <a:prstDash val="solid"/>
+              </a:ln>
+              <a:pattFill prst="ltDnDiag">
+                <a:fgClr>
+                  <a:schemeClr val="accent5">
+                    <a:lumMod val="60000"/>
+                    <a:lumOff val="40000"/>
+                  </a:schemeClr>
+                </a:fgClr>
+                <a:bgClr>
+                  <a:schemeClr val="bg1"/>
+                </a:bgClr>
+              </a:pattFill>
+              <a:latin typeface="Times New Roman" panose="02020603050405020304" pitchFamily="18" charset="0"/>
+              <a:cs typeface="Times New Roman" panose="02020603050405020304" pitchFamily="18" charset="0"/>
+            </a:endParaRPr>
+          </a:p>
+        </p:txBody>
+      </p:sp>
+      <p:pic>
+        <p:nvPicPr>
+          <p:cNvPr id="13" name="Picture 12">
+            <a:extLst>
+              <a:ext uri="{FF2B5EF4-FFF2-40B4-BE49-F238E27FC236}">
+                <a16:creationId xmlns:a16="http://schemas.microsoft.com/office/drawing/2014/main" id="{5E9ECF73-288F-E54E-02F3-2BCDF7849D0E}"/>
+              </a:ext>
+            </a:extLst>
+          </p:cNvPr>
+          <p:cNvPicPr>
+            <a:picLocks noChangeAspect="1"/>
+          </p:cNvPicPr>
+          <p:nvPr/>
+        </p:nvPicPr>
+        <p:blipFill>
+          <a:blip r:embed="rId2" cstate="print">
+            <a:extLst>
+              <a:ext uri="{28A0092B-C50C-407E-A947-70E740481C1C}">
+                <a14:useLocalDpi xmlns:a14="http://schemas.microsoft.com/office/drawing/2010/main" val="0"/>
+              </a:ext>
+            </a:extLst>
+          </a:blip>
+          <a:stretch>
+            <a:fillRect/>
+          </a:stretch>
+        </p:blipFill>
+        <p:spPr>
+          <a:xfrm>
+            <a:off x="152400" y="450515"/>
+            <a:ext cx="685800" cy="656925"/>
+          </a:xfrm>
+          <a:prstGeom prst="rect">
+            <a:avLst/>
+          </a:prstGeom>
+        </p:spPr>
+      </p:pic>
+      <p:pic>
+        <p:nvPicPr>
+          <p:cNvPr id="15" name="Picture 14">
+            <a:extLst>
+              <a:ext uri="{FF2B5EF4-FFF2-40B4-BE49-F238E27FC236}">
+                <a16:creationId xmlns:a16="http://schemas.microsoft.com/office/drawing/2014/main" id="{E48F6149-18D2-23EE-44EC-140872652A72}"/>
+              </a:ext>
+            </a:extLst>
+          </p:cNvPr>
+          <p:cNvPicPr>
+            <a:picLocks noChangeAspect="1"/>
+          </p:cNvPicPr>
+          <p:nvPr/>
+        </p:nvPicPr>
+        <p:blipFill>
+          <a:blip r:embed="rId3"/>
+          <a:stretch>
+            <a:fillRect/>
+          </a:stretch>
+        </p:blipFill>
+        <p:spPr>
+          <a:xfrm>
+            <a:off x="381000" y="1323640"/>
+            <a:ext cx="8382000" cy="4696159"/>
+          </a:xfrm>
+          <a:prstGeom prst="rect">
+            <a:avLst/>
+          </a:prstGeom>
+        </p:spPr>
+      </p:pic>
+    </p:spTree>
+    <p:extLst>
+      <p:ext uri="{BB962C8B-B14F-4D97-AF65-F5344CB8AC3E}">
+        <p14:creationId xmlns:p14="http://schemas.microsoft.com/office/powerpoint/2010/main" val="1458339390"/>
+      </p:ext>
+    </p:extLst>
+  </p:cSld>
+  <p:clrMapOvr>
+    <a:masterClrMapping/>
+  </p:clrMapOvr>
+</p:sld>
+</file>
+
+<file path=ppt/slides/slide26.xml><?xml version="1.0" encoding="utf-8"?>
+<p:sld xmlns:a="http://schemas.openxmlformats.org/drawingml/2006/main" xmlns:r="http://schemas.openxmlformats.org/officeDocument/2006/relationships" xmlns:p="http://schemas.openxmlformats.org/presentationml/2006/main">
+  <p:cSld>
+    <p:spTree>
+      <p:nvGrpSpPr>
+        <p:cNvPr id="1" name=""/>
+        <p:cNvGrpSpPr/>
+        <p:nvPr/>
+      </p:nvGrpSpPr>
+      <p:grpSpPr>
+        <a:xfrm>
+          <a:off x="0" y="0"/>
+          <a:ext cx="0" cy="0"/>
+          <a:chOff x="0" y="0"/>
+          <a:chExt cx="0" cy="0"/>
+        </a:xfrm>
+      </p:grpSpPr>
+      <p:sp>
+        <p:nvSpPr>
+          <p:cNvPr id="2" name="Title 1">
+            <a:extLst>
+              <a:ext uri="{FF2B5EF4-FFF2-40B4-BE49-F238E27FC236}">
+                <a16:creationId xmlns:a16="http://schemas.microsoft.com/office/drawing/2014/main" id="{D27DBD70-C636-3A85-6845-515D728C181D}"/>
+              </a:ext>
+            </a:extLst>
+          </p:cNvPr>
+          <p:cNvSpPr>
+            <a:spLocks noGrp="1"/>
+          </p:cNvSpPr>
+          <p:nvPr>
+            <p:ph type="title"/>
+          </p:nvPr>
+        </p:nvSpPr>
+        <p:spPr/>
+        <p:txBody>
+          <a:bodyPr/>
+          <a:lstStyle/>
+          <a:p>
+            <a:endParaRPr lang="en-IN"/>
+          </a:p>
+        </p:txBody>
+      </p:sp>
+      <p:sp>
+        <p:nvSpPr>
+          <p:cNvPr id="3" name="Text Placeholder 2">
+            <a:extLst>
+              <a:ext uri="{FF2B5EF4-FFF2-40B4-BE49-F238E27FC236}">
+                <a16:creationId xmlns:a16="http://schemas.microsoft.com/office/drawing/2014/main" id="{C2079208-728D-DF3B-538E-58169C1E6517}"/>
+              </a:ext>
+            </a:extLst>
+          </p:cNvPr>
+          <p:cNvSpPr>
+            <a:spLocks noGrp="1"/>
+          </p:cNvSpPr>
+          <p:nvPr>
+            <p:ph type="body" idx="1"/>
+          </p:nvPr>
+        </p:nvSpPr>
+        <p:spPr>
+          <a:xfrm>
+            <a:off x="457200" y="1577340"/>
+            <a:ext cx="8229600" cy="4308872"/>
+          </a:xfrm>
+        </p:spPr>
+        <p:txBody>
+          <a:bodyPr/>
+          <a:lstStyle/>
+          <a:p>
+            <a:pPr marL="285750" indent="-285750">
+              <a:buFont typeface="Wingdings" panose="05000000000000000000" pitchFamily="2" charset="2"/>
+              <a:buChar char="q"/>
+            </a:pPr>
+            <a:r>
+              <a:rPr lang="en-US" sz="2000" dirty="0">
+                <a:latin typeface="Times New Roman" panose="02020603050405020304" pitchFamily="18" charset="0"/>
+                <a:cs typeface="Times New Roman" panose="02020603050405020304" pitchFamily="18" charset="0"/>
+              </a:rPr>
+              <a:t>Conclusion</a:t>
+            </a:r>
+          </a:p>
+          <a:p>
+            <a:endParaRPr lang="en-US" sz="2000" dirty="0">
+              <a:latin typeface="Times New Roman" panose="02020603050405020304" pitchFamily="18" charset="0"/>
+              <a:cs typeface="Times New Roman" panose="02020603050405020304" pitchFamily="18" charset="0"/>
+            </a:endParaRPr>
+          </a:p>
+          <a:p>
+            <a:pPr marL="342900" indent="-342900">
+              <a:buFont typeface="Wingdings" panose="05000000000000000000" pitchFamily="2" charset="2"/>
+              <a:buChar char="ü"/>
+            </a:pPr>
+            <a:r>
+              <a:rPr lang="en-US" sz="2000" dirty="0">
+                <a:latin typeface="Times New Roman" panose="02020603050405020304" pitchFamily="18" charset="0"/>
+                <a:cs typeface="Times New Roman" panose="02020603050405020304" pitchFamily="18" charset="0"/>
+              </a:rPr>
+              <a:t>Successfully developed a Python-based password generator.</a:t>
+            </a:r>
+          </a:p>
+          <a:p>
+            <a:pPr marL="342900" indent="-342900">
+              <a:buFont typeface="Wingdings" panose="05000000000000000000" pitchFamily="2" charset="2"/>
+              <a:buChar char="ü"/>
+            </a:pPr>
+            <a:r>
+              <a:rPr lang="en-US" sz="2000" dirty="0">
+                <a:latin typeface="Times New Roman" panose="02020603050405020304" pitchFamily="18" charset="0"/>
+                <a:cs typeface="Times New Roman" panose="02020603050405020304" pitchFamily="18" charset="0"/>
+              </a:rPr>
+              <a:t>Applied Python concepts such as classes, functions, loops and conditional statements.</a:t>
+            </a:r>
+          </a:p>
+          <a:p>
+            <a:pPr marL="342900" indent="-342900">
+              <a:buFont typeface="Wingdings" panose="05000000000000000000" pitchFamily="2" charset="2"/>
+              <a:buChar char="ü"/>
+            </a:pPr>
+            <a:r>
+              <a:rPr lang="en-US" sz="2000" dirty="0">
+                <a:latin typeface="Times New Roman" panose="02020603050405020304" pitchFamily="18" charset="0"/>
+                <a:cs typeface="Times New Roman" panose="02020603050405020304" pitchFamily="18" charset="0"/>
+              </a:rPr>
+              <a:t>Learned secure random selection using the secrets module.</a:t>
+            </a:r>
+          </a:p>
+          <a:p>
+            <a:pPr marL="342900" indent="-342900">
+              <a:buFont typeface="Wingdings" panose="05000000000000000000" pitchFamily="2" charset="2"/>
+              <a:buChar char="ü"/>
+            </a:pPr>
+            <a:r>
+              <a:rPr lang="en-US" sz="2000" dirty="0">
+                <a:latin typeface="Times New Roman" panose="02020603050405020304" pitchFamily="18" charset="0"/>
+                <a:cs typeface="Times New Roman" panose="02020603050405020304" pitchFamily="18" charset="0"/>
+              </a:rPr>
+              <a:t>Gained practical experience with testing and GitHub.</a:t>
+            </a:r>
+          </a:p>
+          <a:p>
+            <a:pPr marL="342900" indent="-342900">
+              <a:buFont typeface="Wingdings" panose="05000000000000000000" pitchFamily="2" charset="2"/>
+              <a:buChar char="ü"/>
+            </a:pPr>
+            <a:endParaRPr lang="en-US" sz="2000" dirty="0">
+              <a:latin typeface="Times New Roman" panose="02020603050405020304" pitchFamily="18" charset="0"/>
+              <a:cs typeface="Times New Roman" panose="02020603050405020304" pitchFamily="18" charset="0"/>
+            </a:endParaRPr>
+          </a:p>
+          <a:p>
+            <a:pPr marL="285750" indent="-285750">
+              <a:buFont typeface="Wingdings" panose="05000000000000000000" pitchFamily="2" charset="2"/>
+              <a:buChar char="q"/>
+            </a:pPr>
+            <a:r>
+              <a:rPr lang="en-US" sz="2000" dirty="0">
+                <a:latin typeface="Times New Roman" panose="02020603050405020304" pitchFamily="18" charset="0"/>
+                <a:cs typeface="Times New Roman" panose="02020603050405020304" pitchFamily="18" charset="0"/>
+              </a:rPr>
+              <a:t>Future Scope</a:t>
+            </a:r>
+          </a:p>
+          <a:p>
+            <a:endParaRPr lang="en-US" sz="2000" dirty="0">
+              <a:latin typeface="Times New Roman" panose="02020603050405020304" pitchFamily="18" charset="0"/>
+              <a:cs typeface="Times New Roman" panose="02020603050405020304" pitchFamily="18" charset="0"/>
+            </a:endParaRPr>
+          </a:p>
+          <a:p>
+            <a:pPr marL="342900" indent="-342900">
+              <a:buFont typeface="Wingdings" panose="05000000000000000000" pitchFamily="2" charset="2"/>
+              <a:buChar char="ü"/>
+            </a:pPr>
+            <a:r>
+              <a:rPr lang="en-US" sz="2000" dirty="0">
+                <a:latin typeface="Times New Roman" panose="02020603050405020304" pitchFamily="18" charset="0"/>
+                <a:cs typeface="Times New Roman" panose="02020603050405020304" pitchFamily="18" charset="0"/>
+              </a:rPr>
+              <a:t>Develop a browser-based version.</a:t>
+            </a:r>
+          </a:p>
+          <a:p>
+            <a:pPr marL="342900" indent="-342900">
+              <a:buFont typeface="Wingdings" panose="05000000000000000000" pitchFamily="2" charset="2"/>
+              <a:buChar char="ü"/>
+            </a:pPr>
+            <a:r>
+              <a:rPr lang="en-US" sz="2000" dirty="0">
+                <a:latin typeface="Times New Roman" panose="02020603050405020304" pitchFamily="18" charset="0"/>
+                <a:cs typeface="Times New Roman" panose="02020603050405020304" pitchFamily="18" charset="0"/>
+              </a:rPr>
+              <a:t>Improve the user interface.</a:t>
+            </a:r>
+          </a:p>
+          <a:p>
+            <a:pPr marL="342900" indent="-342900">
+              <a:buFont typeface="Wingdings" panose="05000000000000000000" pitchFamily="2" charset="2"/>
+              <a:buChar char="ü"/>
+            </a:pPr>
+            <a:r>
+              <a:rPr lang="en-US" sz="2000" dirty="0">
+                <a:latin typeface="Times New Roman" panose="02020603050405020304" pitchFamily="18" charset="0"/>
+                <a:cs typeface="Times New Roman" panose="02020603050405020304" pitchFamily="18" charset="0"/>
+              </a:rPr>
+              <a:t>Add further password customization options.</a:t>
+            </a:r>
+          </a:p>
+          <a:p>
+            <a:pPr marL="342900" indent="-342900">
+              <a:buFont typeface="Wingdings" panose="05000000000000000000" pitchFamily="2" charset="2"/>
+              <a:buChar char="ü"/>
+            </a:pPr>
+            <a:r>
+              <a:rPr lang="en-US" sz="2000" dirty="0">
+                <a:latin typeface="Times New Roman" panose="02020603050405020304" pitchFamily="18" charset="0"/>
+                <a:cs typeface="Times New Roman" panose="02020603050405020304" pitchFamily="18" charset="0"/>
+              </a:rPr>
+              <a:t>- Package the desktop application for easier distribution</a:t>
+            </a:r>
+            <a:r>
+              <a:rPr lang="en-US" dirty="0"/>
+              <a:t>.</a:t>
+            </a:r>
+            <a:endParaRPr lang="en-IN" dirty="0"/>
+          </a:p>
+        </p:txBody>
+      </p:sp>
+      <p:sp>
+        <p:nvSpPr>
+          <p:cNvPr id="5" name="Text Placeholder 4">
+            <a:extLst>
+              <a:ext uri="{FF2B5EF4-FFF2-40B4-BE49-F238E27FC236}">
+                <a16:creationId xmlns:a16="http://schemas.microsoft.com/office/drawing/2014/main" id="{DA168030-3E6E-5746-C4DA-ACCD19AE9FDB}"/>
+              </a:ext>
+            </a:extLst>
+          </p:cNvPr>
+          <p:cNvSpPr txBox="1">
+            <a:spLocks/>
+          </p:cNvSpPr>
+          <p:nvPr/>
+        </p:nvSpPr>
+        <p:spPr>
+          <a:xfrm>
+            <a:off x="304800" y="283142"/>
+            <a:ext cx="7467600" cy="817245"/>
+          </a:xfrm>
+          <a:prstGeom prst="roundRect">
+            <a:avLst/>
+          </a:prstGeom>
+        </p:spPr>
+        <p:style>
+          <a:lnRef idx="1">
+            <a:schemeClr val="accent1"/>
+          </a:lnRef>
+          <a:fillRef idx="2">
+            <a:schemeClr val="accent1"/>
+          </a:fillRef>
+          <a:effectRef idx="1">
+            <a:schemeClr val="accent1"/>
+          </a:effectRef>
+          <a:fontRef idx="minor">
+            <a:schemeClr val="dk1"/>
+          </a:fontRef>
+        </p:style>
+        <p:txBody>
+          <a:bodyPr wrap="square" lIns="0" tIns="0" rIns="0" bIns="0" rtlCol="0" anchor="ctr">
+            <a:spAutoFit/>
+          </a:bodyPr>
+          <a:lstStyle>
+            <a:lvl1pPr marL="0">
+              <a:defRPr>
+                <a:solidFill>
+                  <a:schemeClr val="dk1"/>
+                </a:solidFill>
+                <a:latin typeface="+mn-lt"/>
+                <a:ea typeface="+mn-ea"/>
+                <a:cs typeface="+mn-cs"/>
+              </a:defRPr>
+            </a:lvl1pPr>
+            <a:lvl2pPr marL="457200">
+              <a:defRPr>
+                <a:solidFill>
+                  <a:schemeClr val="dk1"/>
+                </a:solidFill>
+                <a:latin typeface="+mn-lt"/>
+                <a:ea typeface="+mn-ea"/>
+                <a:cs typeface="+mn-cs"/>
+              </a:defRPr>
+            </a:lvl2pPr>
+            <a:lvl3pPr marL="914400">
+              <a:defRPr>
+                <a:solidFill>
+                  <a:schemeClr val="dk1"/>
+                </a:solidFill>
+                <a:latin typeface="+mn-lt"/>
+                <a:ea typeface="+mn-ea"/>
+                <a:cs typeface="+mn-cs"/>
+              </a:defRPr>
+            </a:lvl3pPr>
+            <a:lvl4pPr marL="1371600">
+              <a:defRPr>
+                <a:solidFill>
+                  <a:schemeClr val="dk1"/>
+                </a:solidFill>
+                <a:latin typeface="+mn-lt"/>
+                <a:ea typeface="+mn-ea"/>
+                <a:cs typeface="+mn-cs"/>
+              </a:defRPr>
+            </a:lvl4pPr>
+            <a:lvl5pPr marL="1828800">
+              <a:defRPr>
+                <a:solidFill>
+                  <a:schemeClr val="dk1"/>
+                </a:solidFill>
+                <a:latin typeface="+mn-lt"/>
+                <a:ea typeface="+mn-ea"/>
+                <a:cs typeface="+mn-cs"/>
+              </a:defRPr>
+            </a:lvl5pPr>
+            <a:lvl6pPr marL="2286000">
+              <a:defRPr>
+                <a:solidFill>
+                  <a:schemeClr val="dk1"/>
+                </a:solidFill>
+                <a:latin typeface="+mn-lt"/>
+                <a:ea typeface="+mn-ea"/>
+                <a:cs typeface="+mn-cs"/>
+              </a:defRPr>
+            </a:lvl6pPr>
+            <a:lvl7pPr marL="2743200">
+              <a:defRPr>
+                <a:solidFill>
+                  <a:schemeClr val="dk1"/>
+                </a:solidFill>
+                <a:latin typeface="+mn-lt"/>
+                <a:ea typeface="+mn-ea"/>
+                <a:cs typeface="+mn-cs"/>
+              </a:defRPr>
+            </a:lvl7pPr>
+            <a:lvl8pPr marL="3200400">
+              <a:defRPr>
+                <a:solidFill>
+                  <a:schemeClr val="dk1"/>
+                </a:solidFill>
+                <a:latin typeface="+mn-lt"/>
+                <a:ea typeface="+mn-ea"/>
+                <a:cs typeface="+mn-cs"/>
+              </a:defRPr>
+            </a:lvl8pPr>
+            <a:lvl9pPr marL="3657600">
+              <a:defRPr>
+                <a:solidFill>
+                  <a:schemeClr val="dk1"/>
+                </a:solidFill>
+                <a:latin typeface="+mn-lt"/>
+                <a:ea typeface="+mn-ea"/>
+                <a:cs typeface="+mn-cs"/>
+              </a:defRPr>
+            </a:lvl9pPr>
+          </a:lstStyle>
+          <a:p>
+            <a:pPr algn="ctr"/>
+            <a:r>
+              <a:rPr lang="en-US" sz="4800" b="1" dirty="0">
+                <a:ln w="12700">
+                  <a:solidFill>
+                    <a:schemeClr val="accent5"/>
+                  </a:solidFill>
+                  <a:prstDash val="solid"/>
+                </a:ln>
+                <a:pattFill prst="ltDnDiag">
+                  <a:fgClr>
+                    <a:schemeClr val="accent5">
+                      <a:lumMod val="60000"/>
+                      <a:lumOff val="40000"/>
+                    </a:schemeClr>
+                  </a:fgClr>
+                  <a:bgClr>
+                    <a:schemeClr val="bg1"/>
+                  </a:bgClr>
+                </a:pattFill>
+                <a:latin typeface="Times New Roman" panose="02020603050405020304" pitchFamily="18" charset="0"/>
+                <a:cs typeface="Times New Roman" panose="02020603050405020304" pitchFamily="18" charset="0"/>
+              </a:rPr>
+              <a:t>Conclusion</a:t>
+            </a:r>
+            <a:endParaRPr lang="en-IN" sz="4800" b="1" dirty="0">
+              <a:ln w="12700">
+                <a:solidFill>
+                  <a:schemeClr val="accent5"/>
+                </a:solidFill>
+                <a:prstDash val="solid"/>
+              </a:ln>
+              <a:pattFill prst="ltDnDiag">
+                <a:fgClr>
+                  <a:schemeClr val="accent5">
+                    <a:lumMod val="60000"/>
+                    <a:lumOff val="40000"/>
+                  </a:schemeClr>
+                </a:fgClr>
+                <a:bgClr>
+                  <a:schemeClr val="bg1"/>
+                </a:bgClr>
+              </a:pattFill>
+              <a:latin typeface="Times New Roman" panose="02020603050405020304" pitchFamily="18" charset="0"/>
+              <a:cs typeface="Times New Roman" panose="02020603050405020304" pitchFamily="18" charset="0"/>
+            </a:endParaRPr>
+          </a:p>
+        </p:txBody>
+      </p:sp>
+      <p:pic>
+        <p:nvPicPr>
+          <p:cNvPr id="7" name="Picture 6">
+            <a:extLst>
+              <a:ext uri="{FF2B5EF4-FFF2-40B4-BE49-F238E27FC236}">
+                <a16:creationId xmlns:a16="http://schemas.microsoft.com/office/drawing/2014/main" id="{34BCE923-87F5-8DBE-BAE9-FA05368A76EC}"/>
+              </a:ext>
+            </a:extLst>
+          </p:cNvPr>
+          <p:cNvPicPr>
+            <a:picLocks noChangeAspect="1"/>
+          </p:cNvPicPr>
+          <p:nvPr/>
+        </p:nvPicPr>
+        <p:blipFill>
+          <a:blip r:embed="rId2" cstate="print">
+            <a:extLst>
+              <a:ext uri="{28A0092B-C50C-407E-A947-70E740481C1C}">
+                <a14:useLocalDpi xmlns:a14="http://schemas.microsoft.com/office/drawing/2010/main" val="0"/>
+              </a:ext>
+            </a:extLst>
+          </a:blip>
+          <a:stretch>
+            <a:fillRect/>
+          </a:stretch>
+        </p:blipFill>
+        <p:spPr>
+          <a:xfrm>
+            <a:off x="304800" y="283141"/>
+            <a:ext cx="990600" cy="817245"/>
+          </a:xfrm>
+          <a:prstGeom prst="rect">
+            <a:avLst/>
+          </a:prstGeom>
+        </p:spPr>
+      </p:pic>
+    </p:spTree>
+    <p:extLst>
+      <p:ext uri="{BB962C8B-B14F-4D97-AF65-F5344CB8AC3E}">
+        <p14:creationId xmlns:p14="http://schemas.microsoft.com/office/powerpoint/2010/main" val="3565792235"/>
+      </p:ext>
+    </p:extLst>
+  </p:cSld>
+  <p:clrMapOvr>
+    <a:masterClrMapping/>
+  </p:clrMapOvr>
+</p:sld>
+</file>
+
+<file path=ppt/slides/slide27.xml><?xml version="1.0" encoding="utf-8"?>
+<p:sld xmlns:a="http://schemas.openxmlformats.org/drawingml/2006/main" xmlns:r="http://schemas.openxmlformats.org/officeDocument/2006/relationships" xmlns:p="http://schemas.openxmlformats.org/presentationml/2006/main">
+  <p:cSld>
+    <p:spTree>
+      <p:nvGrpSpPr>
+        <p:cNvPr id="1" name=""/>
+        <p:cNvGrpSpPr/>
+        <p:nvPr/>
+      </p:nvGrpSpPr>
+      <p:grpSpPr>
+        <a:xfrm>
+          <a:off x="0" y="0"/>
+          <a:ext cx="0" cy="0"/>
+          <a:chOff x="0" y="0"/>
+          <a:chExt cx="0" cy="0"/>
+        </a:xfrm>
+      </p:grpSpPr>
+      <p:sp>
+        <p:nvSpPr>
+          <p:cNvPr id="2" name="Title 1">
+            <a:extLst>
+              <a:ext uri="{FF2B5EF4-FFF2-40B4-BE49-F238E27FC236}">
+                <a16:creationId xmlns:a16="http://schemas.microsoft.com/office/drawing/2014/main" id="{13820387-5A7B-F4D2-CC5D-A853F50F86B8}"/>
+              </a:ext>
+            </a:extLst>
+          </p:cNvPr>
+          <p:cNvSpPr>
+            <a:spLocks noGrp="1"/>
+          </p:cNvSpPr>
+          <p:nvPr>
+            <p:ph type="title"/>
+          </p:nvPr>
+        </p:nvSpPr>
+        <p:spPr>
+          <a:xfrm>
+            <a:off x="2133600" y="2896496"/>
+            <a:ext cx="3997751" cy="1477328"/>
+          </a:xfrm>
+        </p:spPr>
+        <p:txBody>
+          <a:bodyPr/>
+          <a:lstStyle/>
+          <a:p>
+            <a:r>
+              <a:rPr lang="en-US" dirty="0"/>
+              <a:t>Thank You</a:t>
+            </a:r>
+            <a:endParaRPr lang="en-IN" dirty="0"/>
+          </a:p>
+        </p:txBody>
+      </p:sp>
+      <p:sp>
+        <p:nvSpPr>
+          <p:cNvPr id="3" name="Text Placeholder 2">
+            <a:extLst>
+              <a:ext uri="{FF2B5EF4-FFF2-40B4-BE49-F238E27FC236}">
+                <a16:creationId xmlns:a16="http://schemas.microsoft.com/office/drawing/2014/main" id="{4F6B8FFE-C3A4-2E3A-EB25-687465BBA09B}"/>
+              </a:ext>
+            </a:extLst>
+          </p:cNvPr>
+          <p:cNvSpPr>
+            <a:spLocks noGrp="1"/>
+          </p:cNvSpPr>
+          <p:nvPr>
+            <p:ph type="body" idx="1"/>
+          </p:nvPr>
+        </p:nvSpPr>
+        <p:spPr>
+          <a:xfrm>
+            <a:off x="457200" y="1577340"/>
+            <a:ext cx="8229600" cy="276999"/>
+          </a:xfrm>
+        </p:spPr>
+        <p:txBody>
+          <a:bodyPr/>
+          <a:lstStyle/>
+          <a:p>
+            <a:endParaRPr lang="en-IN" dirty="0"/>
+          </a:p>
+        </p:txBody>
+      </p:sp>
+      <p:sp>
+        <p:nvSpPr>
+          <p:cNvPr id="5" name="TextBox 4">
+            <a:extLst>
+              <a:ext uri="{FF2B5EF4-FFF2-40B4-BE49-F238E27FC236}">
+                <a16:creationId xmlns:a16="http://schemas.microsoft.com/office/drawing/2014/main" id="{99839101-1505-BE2A-A1B9-E17668038EA0}"/>
+              </a:ext>
+            </a:extLst>
+          </p:cNvPr>
+          <p:cNvSpPr txBox="1"/>
+          <p:nvPr/>
+        </p:nvSpPr>
+        <p:spPr>
+          <a:xfrm>
+            <a:off x="5257800" y="2896497"/>
+            <a:ext cx="1143000" cy="769441"/>
+          </a:xfrm>
+          <a:prstGeom prst="rect">
+            <a:avLst/>
+          </a:prstGeom>
+          <a:noFill/>
+        </p:spPr>
+        <p:txBody>
+          <a:bodyPr wrap="square">
+            <a:spAutoFit/>
+          </a:bodyPr>
+          <a:lstStyle/>
+          <a:p>
+            <a:r>
+              <a:rPr lang="en-IN" sz="4400" dirty="0">
+                <a:effectLst/>
+              </a:rPr>
+              <a:t>🙏</a:t>
+            </a:r>
+            <a:endParaRPr lang="en-IN" sz="4400" dirty="0"/>
+          </a:p>
+        </p:txBody>
+      </p:sp>
+    </p:spTree>
+    <p:extLst>
+      <p:ext uri="{BB962C8B-B14F-4D97-AF65-F5344CB8AC3E}">
+        <p14:creationId xmlns:p14="http://schemas.microsoft.com/office/powerpoint/2010/main" val="1586146584"/>
+      </p:ext>
+    </p:extLst>
   </p:cSld>
   <p:clrMapOvr>
     <a:masterClrMapping/>
